--- a/REF_PAPERS_3.pptx
+++ b/REF_PAPERS_3.pptx
@@ -3473,13 +3473,13 @@
   <p:clrMapOvr>
     <a:masterClrMapping/>
   </p:clrMapOvr>
-  <mc:AlternateContent xmlns:mc="http://schemas.openxmlformats.org/markup-compatibility/2006">
-    <mc:Choice xmlns:p15="http://schemas.microsoft.com/office/powerpoint/2012/main" Requires="p15">
+  <mc:AlternateContent xmlns:mc="http://schemas.openxmlformats.org/markup-compatibility/2006" xmlns:p15="http://schemas.microsoft.com/office/powerpoint/2012/main">
+    <mc:Choice Requires="p15">
       <p:transition xmlns:p14="http://schemas.microsoft.com/office/powerpoint/2010/main" spd="slow" p14:dur="1250">
         <p15:prstTrans prst="peelOff"/>
       </p:transition>
     </mc:Choice>
-    <mc:Fallback>
+    <mc:Fallback xmlns="">
       <p:transition spd="slow">
         <p:fade/>
       </p:transition>
@@ -3783,7 +3783,7 @@
                 </a:solidFill>
                 <a:latin typeface="Arial"/>
               </a:rPr>
-              <a:t>Towards Detection of Network Anomalies using ML on NSL-KDD...</a:t>
+              <a:t>Towards Detection of Network Anomalies using ML on NSL-KDD</a:t>
             </a:r>
           </a:p>
           <a:p>
@@ -3804,23 +3804,8 @@
                 </a:solidFill>
                 <a:latin typeface="Arial"/>
               </a:rPr>
-              <a:t>Corrected KDD's duplicate biases using 125,973 </a:t>
-            </a:r>
-            <a:r>
-              <a:rPr sz="1300" b="0" i="0">
-                <a:solidFill>
-                  <a:srgbClr val="1E293B"/>
-                </a:solidFill>
-                <a:latin typeface="Arial"/>
-              </a:rPr>
-              <a:t>training records.</a:t>
-            </a:r>
-            <a:endParaRPr sz="1300" b="0" i="0" dirty="0">
-              <a:solidFill>
-                <a:srgbClr val="1E293B"/>
-              </a:solidFill>
-              <a:latin typeface="Arial"/>
-            </a:endParaRPr>
+              <a:t>Corrected KDD's duplicate biases using 125,973 training records.</a:t>
+            </a:r>
           </a:p>
           <a:p>
             <a:pPr marL="285750" indent="-285750" algn="just">
@@ -3840,23 +3825,8 @@
                 </a:solidFill>
                 <a:latin typeface="Arial"/>
               </a:rPr>
-              <a:t>Random Forest feature scaling (0.05 threshold) isolated </a:t>
-            </a:r>
-            <a:r>
-              <a:rPr sz="1300" b="0" i="0">
-                <a:solidFill>
-                  <a:srgbClr val="1E293B"/>
-                </a:solidFill>
-                <a:latin typeface="Arial"/>
-              </a:rPr>
-              <a:t>9 features.</a:t>
-            </a:r>
-            <a:endParaRPr sz="1300" b="0" i="0" dirty="0">
-              <a:solidFill>
-                <a:srgbClr val="1E293B"/>
-              </a:solidFill>
-              <a:latin typeface="Arial"/>
-            </a:endParaRPr>
+              <a:t>Random Forest feature scaling (0.05 threshold) isolated 9 features.</a:t>
+            </a:r>
           </a:p>
           <a:p>
             <a:pPr marL="285750" indent="-285750" algn="just">
@@ -3876,23 +3846,8 @@
                 </a:solidFill>
                 <a:latin typeface="Arial"/>
               </a:rPr>
-              <a:t>K-Nearest Neighbors model achieved 98.24% </a:t>
-            </a:r>
-            <a:r>
-              <a:rPr sz="1300" b="0" i="0">
-                <a:solidFill>
-                  <a:srgbClr val="1E293B"/>
-                </a:solidFill>
-                <a:latin typeface="Arial"/>
-              </a:rPr>
-              <a:t>testing accuracy.</a:t>
-            </a:r>
-            <a:endParaRPr sz="1300" b="0" i="0" dirty="0">
-              <a:solidFill>
-                <a:srgbClr val="1E293B"/>
-              </a:solidFill>
-              <a:latin typeface="Arial"/>
-            </a:endParaRPr>
+              <a:t>K-Nearest Neighbors model achieved 98.24% testing accuracy.</a:t>
+            </a:r>
           </a:p>
         </p:txBody>
       </p:sp>
@@ -4036,7 +3991,7 @@
                 </a:solidFill>
                 <a:latin typeface="Arial"/>
               </a:rPr>
-              <a:t>Comparative performance evaluation of ML classifiers on NSL-KDD...</a:t>
+              <a:t>Comparative performance evaluation of ML classifiers on NSL-KDD</a:t>
             </a:r>
           </a:p>
           <a:p>
@@ -4057,23 +4012,8 @@
                 </a:solidFill>
                 <a:latin typeface="Arial"/>
               </a:rPr>
-              <a:t>Systematically compared LSVM, QSVM, KNN, LDA, </a:t>
-            </a:r>
-            <a:r>
-              <a:rPr sz="1300" b="0" i="0">
-                <a:solidFill>
-                  <a:srgbClr val="1E293B"/>
-                </a:solidFill>
-                <a:latin typeface="Arial"/>
-              </a:rPr>
-              <a:t>and QDA.</a:t>
-            </a:r>
-            <a:endParaRPr sz="1300" b="0" i="0" dirty="0">
-              <a:solidFill>
-                <a:srgbClr val="1E293B"/>
-              </a:solidFill>
-              <a:latin typeface="Arial"/>
-            </a:endParaRPr>
+              <a:t>Systematically compared LSVM, QSVM, KNN, LDA, and QDA.</a:t>
+            </a:r>
           </a:p>
           <a:p>
             <a:pPr marL="285750" indent="-285750" algn="just">
@@ -4093,23 +4033,8 @@
                 </a:solidFill>
                 <a:latin typeface="Arial"/>
               </a:rPr>
-              <a:t>Neighborhood-based KNN classifier achieved 98.55</a:t>
-            </a:r>
-            <a:r>
-              <a:rPr sz="1300" b="0" i="0">
-                <a:solidFill>
-                  <a:srgbClr val="1E293B"/>
-                </a:solidFill>
-                <a:latin typeface="Arial"/>
-              </a:rPr>
-              <a:t>% accuracy.</a:t>
-            </a:r>
-            <a:endParaRPr sz="1300" b="0" i="0" dirty="0">
-              <a:solidFill>
-                <a:srgbClr val="1E293B"/>
-              </a:solidFill>
-              <a:latin typeface="Arial"/>
-            </a:endParaRPr>
+              <a:t>Neighborhood-based KNN classifier achieved 98.55% accuracy.</a:t>
+            </a:r>
           </a:p>
           <a:p>
             <a:pPr marL="285750" indent="-285750" algn="just">
@@ -4129,23 +4054,8 @@
                 </a:solidFill>
                 <a:latin typeface="Arial"/>
               </a:rPr>
-              <a:t>Proved high local clustering and linear separability </a:t>
-            </a:r>
-            <a:r>
-              <a:rPr sz="1300" b="0" i="0">
-                <a:solidFill>
-                  <a:srgbClr val="1E293B"/>
-                </a:solidFill>
-                <a:latin typeface="Arial"/>
-              </a:rPr>
-              <a:t>of features.</a:t>
-            </a:r>
-            <a:endParaRPr sz="1300" b="0" i="0" dirty="0">
-              <a:solidFill>
-                <a:srgbClr val="1E293B"/>
-              </a:solidFill>
-              <a:latin typeface="Arial"/>
-            </a:endParaRPr>
+              <a:t>Proved high local clustering and linear separability of features.</a:t>
+            </a:r>
           </a:p>
         </p:txBody>
       </p:sp>
@@ -4307,7 +4217,7 @@
                 </a:solidFill>
                 <a:latin typeface="Arial"/>
               </a:rPr>
-              <a:t> and CFS...</a:t>
+              <a:t> and CFS</a:t>
             </a:r>
           </a:p>
           <a:p>
@@ -4346,23 +4256,8 @@
                 </a:solidFill>
                 <a:latin typeface="Arial"/>
               </a:rPr>
-              <a:t> filter with Correlation </a:t>
-            </a:r>
-            <a:r>
-              <a:rPr sz="1300" b="0" i="0">
-                <a:solidFill>
-                  <a:srgbClr val="1E293B"/>
-                </a:solidFill>
-                <a:latin typeface="Arial"/>
-              </a:rPr>
-              <a:t>Feature Selection.</a:t>
-            </a:r>
-            <a:endParaRPr sz="1300" b="0" i="0" dirty="0">
-              <a:solidFill>
-                <a:srgbClr val="1E293B"/>
-              </a:solidFill>
-              <a:latin typeface="Arial"/>
-            </a:endParaRPr>
+              <a:t> filter with Correlation Feature Selection.</a:t>
+            </a:r>
           </a:p>
           <a:p>
             <a:pPr marL="285750" indent="-285750" algn="just">
@@ -4382,23 +4277,8 @@
                 </a:solidFill>
                 <a:latin typeface="Arial"/>
               </a:rPr>
-              <a:t>Trained Random Forest, SVM, Decision Tree, </a:t>
-            </a:r>
-            <a:r>
-              <a:rPr sz="1300" b="0" i="0">
-                <a:solidFill>
-                  <a:srgbClr val="1E293B"/>
-                </a:solidFill>
-                <a:latin typeface="Arial"/>
-              </a:rPr>
-              <a:t>and KNN.</a:t>
-            </a:r>
-            <a:endParaRPr sz="1300" b="0" i="0" dirty="0">
-              <a:solidFill>
-                <a:srgbClr val="1E293B"/>
-              </a:solidFill>
-              <a:latin typeface="Arial"/>
-            </a:endParaRPr>
+              <a:t>Trained Random Forest, SVM, Decision Tree, and KNN.</a:t>
+            </a:r>
           </a:p>
           <a:p>
             <a:pPr marL="285750" indent="-285750" algn="just">
@@ -4418,23 +4298,8 @@
                 </a:solidFill>
                 <a:latin typeface="Arial"/>
               </a:rPr>
-              <a:t>RF and Gradient Boosting achieved 90.00% </a:t>
-            </a:r>
-            <a:r>
-              <a:rPr sz="1300" b="0" i="0">
-                <a:solidFill>
-                  <a:srgbClr val="1E293B"/>
-                </a:solidFill>
-                <a:latin typeface="Arial"/>
-              </a:rPr>
-              <a:t>multi-class accuracy.</a:t>
-            </a:r>
-            <a:endParaRPr sz="1300" b="0" i="0" dirty="0">
-              <a:solidFill>
-                <a:srgbClr val="1E293B"/>
-              </a:solidFill>
-              <a:latin typeface="Arial"/>
-            </a:endParaRPr>
+              <a:t>RF and Gradient Boosting achieved 90.00% multi-class accuracy.</a:t>
+            </a:r>
           </a:p>
         </p:txBody>
       </p:sp>
@@ -5102,7 +4967,7 @@
                 </a:solidFill>
                 <a:latin typeface="Arial"/>
               </a:rPr>
-              <a:t>Comparative performance evaluation of ML classifiers (v2)...</a:t>
+              <a:t>Comparative performance evaluation of ML classifiers (v2)</a:t>
             </a:r>
           </a:p>
           <a:p>
@@ -5159,23 +5024,8 @@
                 </a:solidFill>
                 <a:latin typeface="Arial"/>
               </a:rPr>
-              <a:t>, </a:t>
-            </a:r>
-            <a:r>
-              <a:rPr sz="1300" b="0" i="0">
-                <a:solidFill>
-                  <a:srgbClr val="1E293B"/>
-                </a:solidFill>
-                <a:latin typeface="Arial"/>
-              </a:rPr>
-              <a:t>and MLP.</a:t>
-            </a:r>
-            <a:endParaRPr sz="1300" b="0" i="0" dirty="0">
-              <a:solidFill>
-                <a:srgbClr val="1E293B"/>
-              </a:solidFill>
-              <a:latin typeface="Arial"/>
-            </a:endParaRPr>
+              <a:t>, and MLP.</a:t>
+            </a:r>
           </a:p>
           <a:p>
             <a:pPr marL="285750" indent="-285750" algn="just">
@@ -5204,16 +5054,7 @@
                 </a:solidFill>
                 <a:latin typeface="Arial"/>
               </a:rPr>
-              <a:t> achieved peak 73.7% precision on rare U2R </a:t>
-            </a:r>
-            <a:r>
-              <a:rPr sz="1300" b="0" i="0">
-                <a:solidFill>
-                  <a:srgbClr val="1E293B"/>
-                </a:solidFill>
-                <a:latin typeface="Arial"/>
-              </a:rPr>
-              <a:t>attack class.</a:t>
+              <a:t> achieved peak 73.7% precision on rare U2R attack class.</a:t>
             </a:r>
             <a:endParaRPr lang="en-US" sz="1300" b="0" i="0" dirty="0">
               <a:solidFill>
@@ -5240,23 +5081,8 @@
                 </a:solidFill>
                 <a:latin typeface="Arial"/>
               </a:rPr>
-              <a:t>Voting model suffered massive class bias on highly </a:t>
-            </a:r>
-            <a:r>
-              <a:rPr lang="en-US" sz="1300" b="0" i="0">
-                <a:solidFill>
-                  <a:srgbClr val="1E293B"/>
-                </a:solidFill>
-                <a:latin typeface="Arial"/>
-              </a:rPr>
-              <a:t>imbalanced labels.</a:t>
-            </a:r>
-            <a:endParaRPr lang="en-US" sz="1300" b="0" i="0" dirty="0">
-              <a:solidFill>
-                <a:srgbClr val="1E293B"/>
-              </a:solidFill>
-              <a:latin typeface="Arial"/>
-            </a:endParaRPr>
+              <a:t>Voting model suffered massive class bias on highly imbalanced labels.</a:t>
+            </a:r>
           </a:p>
         </p:txBody>
       </p:sp>
@@ -5265,13 +5091,13 @@
   <p:clrMapOvr>
     <a:masterClrMapping/>
   </p:clrMapOvr>
-  <mc:AlternateContent xmlns:mc="http://schemas.openxmlformats.org/markup-compatibility/2006">
-    <mc:Choice xmlns:p15="http://schemas.microsoft.com/office/powerpoint/2012/main" Requires="p15">
+  <mc:AlternateContent xmlns:mc="http://schemas.openxmlformats.org/markup-compatibility/2006" xmlns:p15="http://schemas.microsoft.com/office/powerpoint/2012/main">
+    <mc:Choice Requires="p15">
       <p:transition xmlns:p14="http://schemas.microsoft.com/office/powerpoint/2010/main" spd="slow" p14:dur="1250">
         <p15:prstTrans prst="peelOff"/>
       </p:transition>
     </mc:Choice>
-    <mc:Fallback>
+    <mc:Fallback xmlns="">
       <p:transition spd="slow">
         <p:fade/>
       </p:transition>
@@ -5842,13 +5668,13 @@
   <p:clrMapOvr>
     <a:masterClrMapping/>
   </p:clrMapOvr>
-  <mc:AlternateContent xmlns:mc="http://schemas.openxmlformats.org/markup-compatibility/2006">
-    <mc:Choice xmlns:p15="http://schemas.microsoft.com/office/powerpoint/2012/main" Requires="p15">
+  <mc:AlternateContent xmlns:mc="http://schemas.openxmlformats.org/markup-compatibility/2006" xmlns:p15="http://schemas.microsoft.com/office/powerpoint/2012/main">
+    <mc:Choice Requires="p15">
       <p:transition xmlns:p14="http://schemas.microsoft.com/office/powerpoint/2010/main" spd="slow" p14:dur="1250">
         <p15:prstTrans prst="peelOff"/>
       </p:transition>
     </mc:Choice>
-    <mc:Fallback>
+    <mc:Fallback xmlns="">
       <p:transition spd="slow">
         <p:fade/>
       </p:transition>
@@ -7003,13 +6829,13 @@
   <p:clrMapOvr>
     <a:masterClrMapping/>
   </p:clrMapOvr>
-  <mc:AlternateContent xmlns:mc="http://schemas.openxmlformats.org/markup-compatibility/2006">
-    <mc:Choice xmlns:p15="http://schemas.microsoft.com/office/powerpoint/2012/main" Requires="p15">
+  <mc:AlternateContent xmlns:mc="http://schemas.openxmlformats.org/markup-compatibility/2006" xmlns:p15="http://schemas.microsoft.com/office/powerpoint/2012/main">
+    <mc:Choice Requires="p15">
       <p:transition xmlns:p14="http://schemas.microsoft.com/office/powerpoint/2010/main" spd="slow" p14:dur="1250">
         <p15:prstTrans prst="peelOff"/>
       </p:transition>
     </mc:Choice>
-    <mc:Fallback>
+    <mc:Fallback xmlns="">
       <p:transition spd="slow">
         <p:fade/>
       </p:transition>
@@ -7254,7 +7080,7 @@
         <p:spPr>
           <a:xfrm>
             <a:off x="700887" y="1645920"/>
-            <a:ext cx="3200400" cy="1987019"/>
+            <a:ext cx="3200400" cy="1786964"/>
           </a:xfrm>
           <a:prstGeom prst="rect">
             <a:avLst/>
@@ -7313,7 +7139,7 @@
                 </a:solidFill>
                 <a:latin typeface="Arial"/>
               </a:rPr>
-              <a:t>Selection of efficient ML on Bot-IoT dataset...</a:t>
+              <a:t>Selection of efficient ML on Bot-IoT dataset</a:t>
             </a:r>
           </a:p>
           <a:p>
@@ -7539,7 +7365,7 @@
                 </a:solidFill>
                 <a:latin typeface="Arial"/>
               </a:rPr>
-              <a:t>-IoT...</a:t>
+              <a:t>-IoT</a:t>
             </a:r>
           </a:p>
           <a:p>
@@ -7560,23 +7386,8 @@
                 </a:solidFill>
                 <a:latin typeface="Arial"/>
               </a:rPr>
-              <a:t>Tackled severe class imbalance using SMOTE + </a:t>
-            </a:r>
-            <a:r>
-              <a:rPr sz="1300" b="0" i="0">
-                <a:solidFill>
-                  <a:srgbClr val="1E293B"/>
-                </a:solidFill>
-                <a:latin typeface="Arial"/>
-              </a:rPr>
-              <a:t>under sampling.</a:t>
-            </a:r>
-            <a:endParaRPr sz="1300" b="0" i="0" dirty="0">
-              <a:solidFill>
-                <a:srgbClr val="1E293B"/>
-              </a:solidFill>
-              <a:latin typeface="Arial"/>
-            </a:endParaRPr>
+              <a:t>Tackled severe class imbalance using SMOTE + under sampling.</a:t>
+            </a:r>
           </a:p>
           <a:p>
             <a:pPr marL="285750" indent="-285750" algn="just">
@@ -7596,23 +7407,8 @@
                 </a:solidFill>
                 <a:latin typeface="Arial"/>
               </a:rPr>
-              <a:t>Pearson Correlation selected 14 </a:t>
-            </a:r>
-            <a:r>
-              <a:rPr sz="1300" b="0" i="0">
-                <a:solidFill>
-                  <a:srgbClr val="1E293B"/>
-                </a:solidFill>
-                <a:latin typeface="Arial"/>
-              </a:rPr>
-              <a:t>optimal features.</a:t>
-            </a:r>
-            <a:endParaRPr sz="1300" b="0" i="0" dirty="0">
-              <a:solidFill>
-                <a:srgbClr val="1E293B"/>
-              </a:solidFill>
-              <a:latin typeface="Arial"/>
-            </a:endParaRPr>
+              <a:t>Pearson Correlation selected 14 optimal features.</a:t>
+            </a:r>
           </a:p>
           <a:p>
             <a:pPr marL="285750" indent="-285750" algn="just">
@@ -7632,23 +7428,8 @@
                 </a:solidFill>
                 <a:latin typeface="Arial"/>
               </a:rPr>
-              <a:t>Random Forest achieved 99.2% </a:t>
-            </a:r>
-            <a:r>
-              <a:rPr sz="1300" b="0" i="0">
-                <a:solidFill>
-                  <a:srgbClr val="1E293B"/>
-                </a:solidFill>
-                <a:latin typeface="Arial"/>
-              </a:rPr>
-              <a:t>overfit-resistant accuracy.</a:t>
-            </a:r>
-            <a:endParaRPr sz="1300" b="0" i="0" dirty="0">
-              <a:solidFill>
-                <a:srgbClr val="1E293B"/>
-              </a:solidFill>
-              <a:latin typeface="Arial"/>
-            </a:endParaRPr>
+              <a:t>Random Forest achieved 99.2% overfit-resistant accuracy.</a:t>
+            </a:r>
           </a:p>
         </p:txBody>
       </p:sp>
@@ -7810,7 +7591,7 @@
                 </a:solidFill>
                 <a:latin typeface="Arial"/>
               </a:rPr>
-              <a:t>Ensemble technique of intrusion detection for IoT-edge...</a:t>
+              <a:t>Ensemble technique of intrusion detection for IoT-edge</a:t>
             </a:r>
           </a:p>
           <a:p>
@@ -7831,23 +7612,8 @@
                 </a:solidFill>
                 <a:latin typeface="Arial"/>
               </a:rPr>
-              <a:t>Proposed edge-decoupled two-stage </a:t>
-            </a:r>
-            <a:r>
-              <a:rPr sz="1300" b="0" i="0">
-                <a:solidFill>
-                  <a:srgbClr val="1E293B"/>
-                </a:solidFill>
-                <a:latin typeface="Arial"/>
-              </a:rPr>
-              <a:t>classification scheme.</a:t>
-            </a:r>
-            <a:endParaRPr sz="1300" b="0" i="0" dirty="0">
-              <a:solidFill>
-                <a:srgbClr val="1E293B"/>
-              </a:solidFill>
-              <a:latin typeface="Arial"/>
-            </a:endParaRPr>
+              <a:t>Proposed edge-decoupled two-stage classification scheme.</a:t>
+            </a:r>
           </a:p>
           <a:p>
             <a:pPr marL="285750" indent="-285750" algn="just">
@@ -7867,23 +7633,8 @@
                 </a:solidFill>
                 <a:latin typeface="Arial"/>
               </a:rPr>
-              <a:t>E-Tree binary filter flags intrusions at 99.95</a:t>
-            </a:r>
-            <a:r>
-              <a:rPr sz="1300" b="0" i="0">
-                <a:solidFill>
-                  <a:srgbClr val="1E293B"/>
-                </a:solidFill>
-                <a:latin typeface="Arial"/>
-              </a:rPr>
-              <a:t>% accuracy.</a:t>
-            </a:r>
-            <a:endParaRPr sz="1300" b="0" i="0" dirty="0">
-              <a:solidFill>
-                <a:srgbClr val="1E293B"/>
-              </a:solidFill>
-              <a:latin typeface="Arial"/>
-            </a:endParaRPr>
+              <a:t>E-Tree binary filter flags intrusions at 99.95% accuracy.</a:t>
+            </a:r>
           </a:p>
           <a:p>
             <a:pPr marL="285750" indent="-285750" algn="just">
@@ -7903,23 +7654,8 @@
                 </a:solidFill>
                 <a:latin typeface="Arial"/>
               </a:rPr>
-              <a:t>RF/MLP ensemble handles multi-class </a:t>
-            </a:r>
-            <a:r>
-              <a:rPr sz="1300" b="0" i="0">
-                <a:solidFill>
-                  <a:srgbClr val="1E293B"/>
-                </a:solidFill>
-                <a:latin typeface="Arial"/>
-              </a:rPr>
-              <a:t>attack profiling.</a:t>
-            </a:r>
-            <a:endParaRPr sz="1300" b="0" i="0" dirty="0">
-              <a:solidFill>
-                <a:srgbClr val="1E293B"/>
-              </a:solidFill>
-              <a:latin typeface="Arial"/>
-            </a:endParaRPr>
+              <a:t>RF/MLP ensemble handles multi-class attack profiling.</a:t>
+            </a:r>
           </a:p>
         </p:txBody>
       </p:sp>
@@ -8063,7 +7799,7 @@
                 </a:solidFill>
                 <a:latin typeface="Arial"/>
               </a:rPr>
-              <a:t>Optimized LSTM-based model for anomaly NIDS...</a:t>
+              <a:t>Optimized LSTM-based model for anomaly NIDS</a:t>
             </a:r>
           </a:p>
           <a:p>
@@ -8084,23 +7820,8 @@
                 </a:solidFill>
                 <a:latin typeface="Arial"/>
               </a:rPr>
-              <a:t>Evaluated metaheuristic tuning on Bot-IoT </a:t>
-            </a:r>
-            <a:r>
-              <a:rPr sz="1300" b="0" i="0">
-                <a:solidFill>
-                  <a:srgbClr val="1E293B"/>
-                </a:solidFill>
-                <a:latin typeface="Arial"/>
-              </a:rPr>
-              <a:t>training instances.</a:t>
-            </a:r>
-            <a:endParaRPr sz="1300" b="0" i="0" dirty="0">
-              <a:solidFill>
-                <a:srgbClr val="1E293B"/>
-              </a:solidFill>
-              <a:latin typeface="Arial"/>
-            </a:endParaRPr>
+              <a:t>Evaluated metaheuristic tuning on Bot-IoT training instances.</a:t>
+            </a:r>
           </a:p>
           <a:p>
             <a:pPr marL="285750" indent="-285750" algn="just">
@@ -8138,23 +7859,8 @@
                 </a:solidFill>
                 <a:latin typeface="Arial"/>
               </a:rPr>
-              <a:t> </a:t>
-            </a:r>
-            <a:r>
-              <a:rPr sz="1300" b="0" i="0">
-                <a:solidFill>
-                  <a:srgbClr val="1E293B"/>
-                </a:solidFill>
-                <a:latin typeface="Arial"/>
-              </a:rPr>
-              <a:t>Swarm Algorithm.</a:t>
-            </a:r>
-            <a:endParaRPr sz="1300" b="0" i="0" dirty="0">
-              <a:solidFill>
-                <a:srgbClr val="1E293B"/>
-              </a:solidFill>
-              <a:latin typeface="Arial"/>
-            </a:endParaRPr>
+              <a:t> Swarm Algorithm.</a:t>
+            </a:r>
           </a:p>
           <a:p>
             <a:pPr marL="285750" indent="-285750" algn="just">
@@ -8174,23 +7880,8 @@
                 </a:solidFill>
                 <a:latin typeface="Arial"/>
               </a:rPr>
-              <a:t>SSA-LSTMIDS registered 86.44% </a:t>
-            </a:r>
-            <a:r>
-              <a:rPr sz="1300" b="0" i="0">
-                <a:solidFill>
-                  <a:srgbClr val="1E293B"/>
-                </a:solidFill>
-                <a:latin typeface="Arial"/>
-              </a:rPr>
-              <a:t>test accuracy.</a:t>
-            </a:r>
-            <a:endParaRPr sz="1300" b="0" i="0" dirty="0">
-              <a:solidFill>
-                <a:srgbClr val="1E293B"/>
-              </a:solidFill>
-              <a:latin typeface="Arial"/>
-            </a:endParaRPr>
+              <a:t>SSA-LSTMIDS registered 86.44% test accuracy.</a:t>
+            </a:r>
           </a:p>
         </p:txBody>
       </p:sp>
@@ -8352,7 +8043,7 @@
                 </a:solidFill>
                 <a:latin typeface="Arial"/>
               </a:rPr>
-              <a:t>Deep learning approaches for intrusion-detection systems...</a:t>
+              <a:t>Deep learning approaches for intrusion-detection systems</a:t>
             </a:r>
           </a:p>
           <a:p>
@@ -8373,23 +8064,8 @@
                 </a:solidFill>
                 <a:latin typeface="Arial"/>
               </a:rPr>
-              <a:t>Surveyed supervised, unsupervised, and hybrid </a:t>
-            </a:r>
-            <a:r>
-              <a:rPr sz="1300" b="0" i="0">
-                <a:solidFill>
-                  <a:srgbClr val="1E293B"/>
-                </a:solidFill>
-                <a:latin typeface="Arial"/>
-              </a:rPr>
-              <a:t>deep learning.</a:t>
-            </a:r>
-            <a:endParaRPr sz="1300" b="0" i="0" dirty="0">
-              <a:solidFill>
-                <a:srgbClr val="1E293B"/>
-              </a:solidFill>
-              <a:latin typeface="Arial"/>
-            </a:endParaRPr>
+              <a:t>Surveyed supervised, unsupervised, and hybrid deep learning.</a:t>
+            </a:r>
           </a:p>
           <a:p>
             <a:pPr marL="285750" indent="-285750" algn="just">
@@ -8409,23 +8085,8 @@
                 </a:solidFill>
                 <a:latin typeface="Arial"/>
               </a:rPr>
-              <a:t>Evaluated binarized LR, SVM, DT, and </a:t>
-            </a:r>
-            <a:r>
-              <a:rPr sz="1300" b="0" i="0">
-                <a:solidFill>
-                  <a:srgbClr val="1E293B"/>
-                </a:solidFill>
-                <a:latin typeface="Arial"/>
-              </a:rPr>
-              <a:t>ANN classifiers.</a:t>
-            </a:r>
-            <a:endParaRPr sz="1300" b="0" i="0" dirty="0">
-              <a:solidFill>
-                <a:srgbClr val="1E293B"/>
-              </a:solidFill>
-              <a:latin typeface="Arial"/>
-            </a:endParaRPr>
+              <a:t>Evaluated binarized LR, SVM, DT, and ANN classifiers.</a:t>
+            </a:r>
           </a:p>
           <a:p>
             <a:pPr marL="285750" indent="-285750" algn="just">
@@ -8445,23 +8106,8 @@
                 </a:solidFill>
                 <a:latin typeface="Arial"/>
               </a:rPr>
-              <a:t>Mapped heavy target vulnerability under DDoS &amp; </a:t>
-            </a:r>
-            <a:r>
-              <a:rPr sz="1300" b="0" i="0">
-                <a:solidFill>
-                  <a:srgbClr val="1E293B"/>
-                </a:solidFill>
-                <a:latin typeface="Arial"/>
-              </a:rPr>
-              <a:t>DoS flooding.</a:t>
-            </a:r>
-            <a:endParaRPr sz="1300" b="0" i="0" dirty="0">
-              <a:solidFill>
-                <a:srgbClr val="1E293B"/>
-              </a:solidFill>
-              <a:latin typeface="Arial"/>
-            </a:endParaRPr>
+              <a:t>Mapped heavy target vulnerability under DDoS &amp; DoS flooding.</a:t>
+            </a:r>
           </a:p>
         </p:txBody>
       </p:sp>
@@ -8605,7 +8251,7 @@
                 </a:solidFill>
                 <a:latin typeface="Arial"/>
               </a:rPr>
-              <a:t>A hybrid feature selection technique based on Firefly...</a:t>
+              <a:t>A hybrid feature selection technique based on Firefly</a:t>
             </a:r>
           </a:p>
           <a:p>
@@ -8626,23 +8272,8 @@
                 </a:solidFill>
                 <a:latin typeface="Arial"/>
               </a:rPr>
-              <a:t>Evaluated on standardized NetFlow </a:t>
-            </a:r>
-            <a:r>
-              <a:rPr sz="1300" b="0" i="0">
-                <a:solidFill>
-                  <a:srgbClr val="1E293B"/>
-                </a:solidFill>
-                <a:latin typeface="Arial"/>
-              </a:rPr>
-              <a:t>NF-BoT-IoT-v2 dataset.</a:t>
-            </a:r>
-            <a:endParaRPr sz="1300" b="0" i="0" dirty="0">
-              <a:solidFill>
-                <a:srgbClr val="1E293B"/>
-              </a:solidFill>
-              <a:latin typeface="Arial"/>
-            </a:endParaRPr>
+              <a:t>Evaluated on standardized NetFlow NF-BoT-IoT-v2 dataset.</a:t>
+            </a:r>
           </a:p>
           <a:p>
             <a:pPr marL="285750" indent="-285750" algn="just">
@@ -8662,23 +8293,8 @@
                 </a:solidFill>
                 <a:latin typeface="Arial"/>
               </a:rPr>
-              <a:t>Spearman rank + Mutual Info + Firefly </a:t>
-            </a:r>
-            <a:r>
-              <a:rPr sz="1300" b="0" i="0">
-                <a:solidFill>
-                  <a:srgbClr val="1E293B"/>
-                </a:solidFill>
-                <a:latin typeface="Arial"/>
-              </a:rPr>
-              <a:t>feature selection.</a:t>
-            </a:r>
-            <a:endParaRPr sz="1300" b="0" i="0" dirty="0">
-              <a:solidFill>
-                <a:srgbClr val="1E293B"/>
-              </a:solidFill>
-              <a:latin typeface="Arial"/>
-            </a:endParaRPr>
+              <a:t>Spearman rank + Mutual Info + Firefly feature selection.</a:t>
+            </a:r>
           </a:p>
           <a:p>
             <a:pPr marL="285750" indent="-285750" algn="just">
@@ -8698,23 +8314,8 @@
                 </a:solidFill>
                 <a:latin typeface="Arial"/>
               </a:rPr>
-              <a:t>Achieved 98.42% accuracy with substantial </a:t>
-            </a:r>
-            <a:r>
-              <a:rPr sz="1300" b="0" i="0">
-                <a:solidFill>
-                  <a:srgbClr val="1E293B"/>
-                </a:solidFill>
-                <a:latin typeface="Arial"/>
-              </a:rPr>
-              <a:t>feature reduction.</a:t>
-            </a:r>
-            <a:endParaRPr sz="1300" b="0" i="0" dirty="0">
-              <a:solidFill>
-                <a:srgbClr val="1E293B"/>
-              </a:solidFill>
-              <a:latin typeface="Arial"/>
-            </a:endParaRPr>
+              <a:t>Achieved 98.42% accuracy with substantial feature reduction.</a:t>
+            </a:r>
           </a:p>
         </p:txBody>
       </p:sp>
@@ -8723,13 +8324,13 @@
   <p:clrMapOvr>
     <a:masterClrMapping/>
   </p:clrMapOvr>
-  <mc:AlternateContent xmlns:mc="http://schemas.openxmlformats.org/markup-compatibility/2006">
-    <mc:Choice xmlns:p15="http://schemas.microsoft.com/office/powerpoint/2012/main" Requires="p15">
+  <mc:AlternateContent xmlns:mc="http://schemas.openxmlformats.org/markup-compatibility/2006" xmlns:p15="http://schemas.microsoft.com/office/powerpoint/2012/main">
+    <mc:Choice Requires="p15">
       <p:transition xmlns:p14="http://schemas.microsoft.com/office/powerpoint/2010/main" spd="slow" p14:dur="1250">
         <p15:prstTrans prst="peelOff"/>
       </p:transition>
     </mc:Choice>
-    <mc:Fallback>
+    <mc:Fallback xmlns="">
       <p:transition spd="slow">
         <p:fade/>
       </p:transition>
@@ -9024,7 +8625,7 @@
                 </a:solidFill>
                 <a:latin typeface="Arial"/>
               </a:rPr>
-              <a:t>Intrusion Detection in IoT Networks using LSTM...</a:t>
+              <a:t>Intrusion Detection in IoT Networks using LSTM</a:t>
             </a:r>
             <a:endParaRPr lang="en-US" sz="1300" b="0" i="1" dirty="0">
               <a:solidFill>
@@ -9048,16 +8649,7 @@
                 </a:solidFill>
                 <a:latin typeface="Arial"/>
               </a:rPr>
-              <a:t>Utilized the UNSW-NB15 dataset (175,341 training </a:t>
-            </a:r>
-            <a:r>
-              <a:rPr sz="1300" b="0" i="0">
-                <a:solidFill>
-                  <a:srgbClr val="1E293B"/>
-                </a:solidFill>
-                <a:latin typeface="Arial"/>
-              </a:rPr>
-              <a:t>records).</a:t>
+              <a:t>Utilized the UNSW-NB15 dataset (175,341 training records).</a:t>
             </a:r>
             <a:endParaRPr lang="en-US" sz="1300" b="0" i="0" dirty="0">
               <a:solidFill>
@@ -9081,16 +8673,7 @@
                 </a:solidFill>
                 <a:latin typeface="Arial"/>
               </a:rPr>
-              <a:t>Applied SMOTE oversampling to correct severe </a:t>
-            </a:r>
-            <a:r>
-              <a:rPr sz="1300" b="0" i="0">
-                <a:solidFill>
-                  <a:srgbClr val="1E293B"/>
-                </a:solidFill>
-                <a:latin typeface="Arial"/>
-              </a:rPr>
-              <a:t>class imbalance.</a:t>
+              <a:t>Applied SMOTE oversampling to correct severe class imbalance.</a:t>
             </a:r>
             <a:endParaRPr lang="en-US" sz="1300" b="0" i="0" dirty="0">
               <a:solidFill>
@@ -9114,23 +8697,8 @@
                 </a:solidFill>
                 <a:latin typeface="Arial"/>
               </a:rPr>
-              <a:t>Bidirectional LSTM model achieved 98.68% </a:t>
-            </a:r>
-            <a:r>
-              <a:rPr sz="1300" b="0" i="0">
-                <a:solidFill>
-                  <a:srgbClr val="1E293B"/>
-                </a:solidFill>
-                <a:latin typeface="Arial"/>
-              </a:rPr>
-              <a:t>binary accuracy.</a:t>
-            </a:r>
-            <a:endParaRPr sz="1300" b="0" i="0" dirty="0">
-              <a:solidFill>
-                <a:srgbClr val="1E293B"/>
-              </a:solidFill>
-              <a:latin typeface="Arial"/>
-            </a:endParaRPr>
+              <a:t>Bidirectional LSTM model achieved 98.68% binary accuracy.</a:t>
+            </a:r>
           </a:p>
         </p:txBody>
       </p:sp>
@@ -9292,7 +8860,7 @@
                 </a:solidFill>
                 <a:latin typeface="Arial"/>
               </a:rPr>
-              <a:t>Intrusion detection for large-scale NetFlow networks...</a:t>
+              <a:t>Intrusion detection for large-scale NetFlow networks</a:t>
             </a:r>
             <a:endParaRPr lang="en-US" sz="1300" b="0" i="1" dirty="0">
               <a:solidFill>
@@ -9316,16 +8884,7 @@
                 </a:solidFill>
                 <a:latin typeface="Arial"/>
               </a:rPr>
-              <a:t>Tested on standardized NetFlow </a:t>
-            </a:r>
-            <a:r>
-              <a:rPr sz="1300" b="0" i="0">
-                <a:solidFill>
-                  <a:srgbClr val="1E293B"/>
-                </a:solidFill>
-                <a:latin typeface="Arial"/>
-              </a:rPr>
-              <a:t>NF-UNSW-NB15-v2 protocol.</a:t>
+              <a:t>Tested on standardized NetFlow NF-UNSW-NB15-v2 protocol.</a:t>
             </a:r>
             <a:endParaRPr lang="en-US" sz="1300" dirty="0">
               <a:solidFill>
@@ -9349,16 +8908,7 @@
                 </a:solidFill>
                 <a:latin typeface="Arial"/>
               </a:rPr>
-              <a:t>Proposed Binary Arithmetic Optimization (BAOA) </a:t>
-            </a:r>
-            <a:r>
-              <a:rPr sz="1300" b="0" i="0">
-                <a:solidFill>
-                  <a:srgbClr val="1E293B"/>
-                </a:solidFill>
-                <a:latin typeface="Arial"/>
-              </a:rPr>
-              <a:t>feature selection.</a:t>
+              <a:t>Proposed Binary Arithmetic Optimization (BAOA) feature selection.</a:t>
             </a:r>
             <a:endParaRPr lang="en-US" sz="1300" dirty="0">
               <a:solidFill>
@@ -9382,23 +8932,8 @@
                 </a:solidFill>
                 <a:latin typeface="Arial"/>
               </a:rPr>
-              <a:t>Reduced features down to 7 (84% reduction), achieving </a:t>
-            </a:r>
-            <a:r>
-              <a:rPr sz="1300" b="0" i="0">
-                <a:solidFill>
-                  <a:srgbClr val="1E293B"/>
-                </a:solidFill>
-                <a:latin typeface="Arial"/>
-              </a:rPr>
-              <a:t>99.69%.</a:t>
-            </a:r>
-            <a:endParaRPr sz="1300" b="0" i="0" dirty="0">
-              <a:solidFill>
-                <a:srgbClr val="1E293B"/>
-              </a:solidFill>
-              <a:latin typeface="Arial"/>
-            </a:endParaRPr>
+              <a:t>Reduced features down to 7 (84% reduction), achieving 99.69%.</a:t>
+            </a:r>
           </a:p>
         </p:txBody>
       </p:sp>
@@ -9560,7 +9095,7 @@
                 </a:solidFill>
                 <a:latin typeface="Arial"/>
               </a:rPr>
-              <a:t>Intrusion Detection System Based on Machine Learning...</a:t>
+              <a:t>Intrusion Detection System Based on Machine Learning</a:t>
             </a:r>
             <a:endParaRPr lang="en-US" sz="1300" b="0" i="1" dirty="0">
               <a:solidFill>
@@ -9584,23 +9119,8 @@
                 </a:solidFill>
                 <a:latin typeface="Arial"/>
               </a:rPr>
-              <a:t>Employed Exhaustive Feature Selection (EFS) </a:t>
-            </a:r>
-            <a:r>
-              <a:rPr sz="1300" b="0" i="0">
-                <a:solidFill>
-                  <a:srgbClr val="1E293B"/>
-                </a:solidFill>
-                <a:latin typeface="Arial"/>
-              </a:rPr>
-              <a:t>across attributes.</a:t>
-            </a:r>
-            <a:endParaRPr sz="1300" b="0" i="0" dirty="0">
-              <a:solidFill>
-                <a:srgbClr val="1E293B"/>
-              </a:solidFill>
-              <a:latin typeface="Arial"/>
-            </a:endParaRPr>
+              <a:t>Employed Exhaustive Feature Selection (EFS) across attributes.</a:t>
+            </a:r>
           </a:p>
           <a:p>
             <a:pPr marL="285750" indent="-285750" algn="just">
@@ -9620,23 +9140,8 @@
                 </a:solidFill>
                 <a:latin typeface="Arial"/>
               </a:rPr>
-              <a:t>Least Square Support Vector Machine (LS-SVM) </a:t>
-            </a:r>
-            <a:r>
-              <a:rPr sz="1300" b="0" i="0">
-                <a:solidFill>
-                  <a:srgbClr val="1E293B"/>
-                </a:solidFill>
-                <a:latin typeface="Arial"/>
-              </a:rPr>
-              <a:t>was trained.</a:t>
-            </a:r>
-            <a:endParaRPr sz="1300" b="0" i="0" dirty="0">
-              <a:solidFill>
-                <a:srgbClr val="1E293B"/>
-              </a:solidFill>
-              <a:latin typeface="Arial"/>
-            </a:endParaRPr>
+              <a:t>Least Square Support Vector Machine (LS-SVM) was trained.</a:t>
+            </a:r>
           </a:p>
           <a:p>
             <a:pPr marL="285750" indent="-285750" algn="just">
@@ -9656,23 +9161,8 @@
                 </a:solidFill>
                 <a:latin typeface="Arial"/>
               </a:rPr>
-              <a:t>Achieved 93.27% accuracy, outperforming standard </a:t>
-            </a:r>
-            <a:r>
-              <a:rPr sz="1300" b="0" i="0">
-                <a:solidFill>
-                  <a:srgbClr val="1E293B"/>
-                </a:solidFill>
-                <a:latin typeface="Arial"/>
-              </a:rPr>
-              <a:t>deep nets.</a:t>
-            </a:r>
-            <a:endParaRPr sz="1300" b="0" i="0" dirty="0">
-              <a:solidFill>
-                <a:srgbClr val="1E293B"/>
-              </a:solidFill>
-              <a:latin typeface="Arial"/>
-            </a:endParaRPr>
+              <a:t>Achieved 93.27% accuracy, outperforming standard deep nets.</a:t>
+            </a:r>
           </a:p>
         </p:txBody>
       </p:sp>
@@ -9825,7 +9315,7 @@
                 </a:solidFill>
                 <a:latin typeface="Arial"/>
               </a:rPr>
-              <a:t>IoT protocol-enabled IDS based on machine learning...</a:t>
+              <a:t>IoT protocol-enabled IDS based on machine learning</a:t>
             </a:r>
           </a:p>
           <a:p>
@@ -9846,23 +9336,8 @@
                 </a:solidFill>
                 <a:latin typeface="Arial"/>
               </a:rPr>
-              <a:t>Examined network layer protocol markers </a:t>
-            </a:r>
-            <a:r>
-              <a:rPr sz="1300" b="0" i="0">
-                <a:solidFill>
-                  <a:srgbClr val="1E293B"/>
-                </a:solidFill>
-                <a:latin typeface="Arial"/>
-              </a:rPr>
-              <a:t>in UNSW-NB15.</a:t>
-            </a:r>
-            <a:endParaRPr sz="1300" b="0" i="0" dirty="0">
-              <a:solidFill>
-                <a:srgbClr val="1E293B"/>
-              </a:solidFill>
-              <a:latin typeface="Arial"/>
-            </a:endParaRPr>
+              <a:t>Examined network layer protocol markers in UNSW-NB15.</a:t>
+            </a:r>
           </a:p>
           <a:p>
             <a:pPr marL="285750" indent="-285750" algn="just">
@@ -9882,23 +9357,8 @@
                 </a:solidFill>
                 <a:latin typeface="Arial"/>
               </a:rPr>
-              <a:t>Analyzed feature categories representing basic, content </a:t>
-            </a:r>
-            <a:r>
-              <a:rPr sz="1300" b="0" i="0">
-                <a:solidFill>
-                  <a:srgbClr val="1E293B"/>
-                </a:solidFill>
-                <a:latin typeface="Arial"/>
-              </a:rPr>
-              <a:t>&amp; flow.</a:t>
-            </a:r>
-            <a:endParaRPr sz="1300" b="0" i="0" dirty="0">
-              <a:solidFill>
-                <a:srgbClr val="1E293B"/>
-              </a:solidFill>
-              <a:latin typeface="Arial"/>
-            </a:endParaRPr>
+              <a:t>Analyzed feature categories representing basic, content &amp; flow.</a:t>
+            </a:r>
           </a:p>
           <a:p>
             <a:pPr marL="285750" indent="-285750" algn="just">
@@ -9918,23 +9378,8 @@
                 </a:solidFill>
                 <a:latin typeface="Arial"/>
               </a:rPr>
-              <a:t>Tree-based classifiers achieved over 97% </a:t>
-            </a:r>
-            <a:r>
-              <a:rPr sz="1300" b="0" i="0">
-                <a:solidFill>
-                  <a:srgbClr val="1E293B"/>
-                </a:solidFill>
-                <a:latin typeface="Arial"/>
-              </a:rPr>
-              <a:t>standard accuracy.</a:t>
-            </a:r>
-            <a:endParaRPr sz="1300" b="0" i="0" dirty="0">
-              <a:solidFill>
-                <a:srgbClr val="1E293B"/>
-              </a:solidFill>
-              <a:latin typeface="Arial"/>
-            </a:endParaRPr>
+              <a:t>Tree-based classifiers achieved over 97% standard accuracy.</a:t>
+            </a:r>
           </a:p>
         </p:txBody>
       </p:sp>
@@ -10202,13 +9647,13 @@
   <p:clrMapOvr>
     <a:masterClrMapping/>
   </p:clrMapOvr>
-  <mc:AlternateContent xmlns:mc="http://schemas.openxmlformats.org/markup-compatibility/2006">
-    <mc:Choice xmlns:p15="http://schemas.microsoft.com/office/powerpoint/2012/main" Requires="p15">
+  <mc:AlternateContent xmlns:mc="http://schemas.openxmlformats.org/markup-compatibility/2006" xmlns:p15="http://schemas.microsoft.com/office/powerpoint/2012/main">
+    <mc:Choice Requires="p15">
       <p:transition xmlns:p14="http://schemas.microsoft.com/office/powerpoint/2010/main" spd="slow" p14:dur="1250">
         <p15:prstTrans prst="peelOff"/>
       </p:transition>
     </mc:Choice>
-    <mc:Fallback>
+    <mc:Fallback xmlns="">
       <p:transition spd="slow">
         <p:fade/>
       </p:transition>
@@ -10512,7 +9957,7 @@
                 </a:solidFill>
                 <a:latin typeface="Arial"/>
               </a:rPr>
-              <a:t>The Choice of Training Data and Generalizability of ML...</a:t>
+              <a:t>The Choice of Training Data and Generalizability of ML</a:t>
             </a:r>
             <a:endParaRPr lang="en-US" sz="1300" b="0" i="1" dirty="0">
               <a:solidFill>
@@ -10536,16 +9981,7 @@
                 </a:solidFill>
                 <a:latin typeface="Arial"/>
               </a:rPr>
-              <a:t>Tested cross-dataset generalizability of </a:t>
-            </a:r>
-            <a:r>
-              <a:rPr sz="1300" b="0" i="0">
-                <a:solidFill>
-                  <a:srgbClr val="1E293B"/>
-                </a:solidFill>
-                <a:latin typeface="Arial"/>
-              </a:rPr>
-              <a:t>NetFlow ToN-IoT-v2.</a:t>
+              <a:t>Tested cross-dataset generalizability of NetFlow ToN-IoT-v2.</a:t>
             </a:r>
             <a:endParaRPr lang="en-US" sz="1300" b="0" i="0" dirty="0">
               <a:solidFill>
@@ -10569,16 +10005,7 @@
                 </a:solidFill>
                 <a:latin typeface="Arial"/>
               </a:rPr>
-              <a:t>Used t-SNE to map extreme capture biases </a:t>
-            </a:r>
-            <a:r>
-              <a:rPr sz="1300" b="0" i="0">
-                <a:solidFill>
-                  <a:srgbClr val="1E293B"/>
-                </a:solidFill>
-                <a:latin typeface="Arial"/>
-              </a:rPr>
-              <a:t>between datasets.</a:t>
+              <a:t>Used t-SNE to map extreme capture biases between datasets.</a:t>
             </a:r>
             <a:endParaRPr lang="en-US" sz="1300" b="0" i="0" dirty="0">
               <a:solidFill>
@@ -10620,23 +10047,8 @@
                 </a:solidFill>
                 <a:latin typeface="Arial"/>
               </a:rPr>
-              <a:t>-IoT and testing on Bot-IoT yielded </a:t>
-            </a:r>
-            <a:r>
-              <a:rPr sz="1300" b="0" i="0">
-                <a:solidFill>
-                  <a:srgbClr val="1E293B"/>
-                </a:solidFill>
-                <a:latin typeface="Arial"/>
-              </a:rPr>
-              <a:t>0.000 F1.</a:t>
-            </a:r>
-            <a:endParaRPr sz="1300" b="0" i="0" dirty="0">
-              <a:solidFill>
-                <a:srgbClr val="1E293B"/>
-              </a:solidFill>
-              <a:latin typeface="Arial"/>
-            </a:endParaRPr>
+              <a:t>-IoT and testing on Bot-IoT yielded 0.000 F1.</a:t>
+            </a:r>
           </a:p>
         </p:txBody>
       </p:sp>
@@ -10780,7 +10192,7 @@
                 </a:solidFill>
                 <a:latin typeface="Arial"/>
               </a:rPr>
-              <a:t>Modeling and implementation approach to evaluate IDS...</a:t>
+              <a:t>Modeling and implementation approach to evaluate IDS</a:t>
             </a:r>
             <a:endParaRPr lang="en-US" sz="1300" b="0" i="1" dirty="0">
               <a:solidFill>
@@ -10804,16 +10216,7 @@
                 </a:solidFill>
                 <a:latin typeface="Arial"/>
               </a:rPr>
-              <a:t>Evaluated heterogeneous device telemetry (Fridge, Garage, </a:t>
-            </a:r>
-            <a:r>
-              <a:rPr sz="1300" b="0" i="0">
-                <a:solidFill>
-                  <a:srgbClr val="1E293B"/>
-                </a:solidFill>
-                <a:latin typeface="Arial"/>
-              </a:rPr>
-              <a:t>GPS).</a:t>
+              <a:t>Evaluated heterogeneous device telemetry (Fridge, Garage, GPS).</a:t>
             </a:r>
             <a:endParaRPr lang="en-US" sz="1300" b="0" i="0" dirty="0">
               <a:solidFill>
@@ -10837,16 +10240,7 @@
                 </a:solidFill>
                 <a:latin typeface="Arial"/>
               </a:rPr>
-              <a:t>Supervised Naïve Bayes, SVM, and MLP classifiers </a:t>
-            </a:r>
-            <a:r>
-              <a:rPr sz="1300" b="0" i="0">
-                <a:solidFill>
-                  <a:srgbClr val="1E293B"/>
-                </a:solidFill>
-                <a:latin typeface="Arial"/>
-              </a:rPr>
-              <a:t>were used.</a:t>
+              <a:t>Supervised Naïve Bayes, SVM, and MLP classifiers were used.</a:t>
             </a:r>
             <a:endParaRPr lang="en-US" sz="1300" b="0" i="0" dirty="0">
               <a:solidFill>
@@ -10870,23 +10264,8 @@
                 </a:solidFill>
                 <a:latin typeface="Arial"/>
               </a:rPr>
-              <a:t>Telemetry-based models reached 98% to 100</a:t>
-            </a:r>
-            <a:r>
-              <a:rPr sz="1300" b="0" i="0">
-                <a:solidFill>
-                  <a:srgbClr val="1E293B"/>
-                </a:solidFill>
-                <a:latin typeface="Arial"/>
-              </a:rPr>
-              <a:t>% accuracy.</a:t>
-            </a:r>
-            <a:endParaRPr sz="1300" b="0" i="0" dirty="0">
-              <a:solidFill>
-                <a:srgbClr val="1E293B"/>
-              </a:solidFill>
-              <a:latin typeface="Arial"/>
-            </a:endParaRPr>
+              <a:t>Telemetry-based models reached 98% to 100% accuracy.</a:t>
+            </a:r>
           </a:p>
         </p:txBody>
       </p:sp>
@@ -11048,7 +10427,7 @@
                 </a:solidFill>
                 <a:latin typeface="Arial"/>
               </a:rPr>
-              <a:t>A Robust Deep Learning NIDS on Modern IoT Protocols...</a:t>
+              <a:t>A Robust Deep Learning NIDS on Modern IoT Protocols</a:t>
             </a:r>
             <a:endParaRPr lang="en-US" sz="1300" b="0" i="1" dirty="0">
               <a:solidFill>
@@ -11075,7 +10454,7 @@
               <a:t>Benchmarked metaheuristic deep networks on </a:t>
             </a:r>
             <a:r>
-              <a:rPr sz="1300" b="0" i="0" err="1">
+              <a:rPr sz="1300" b="0" i="0" dirty="0" err="1">
                 <a:solidFill>
                   <a:srgbClr val="1E293B"/>
                 </a:solidFill>
@@ -11084,7 +10463,7 @@
               <a:t>ToN</a:t>
             </a:r>
             <a:r>
-              <a:rPr sz="1300" b="0" i="0">
+              <a:rPr sz="1300" b="0" i="0" dirty="0">
                 <a:solidFill>
                   <a:srgbClr val="1E293B"/>
                 </a:solidFill>
@@ -11114,16 +10493,7 @@
                 </a:solidFill>
                 <a:latin typeface="Arial"/>
               </a:rPr>
-              <a:t>Evaluated Processed Windows 10 </a:t>
-            </a:r>
-            <a:r>
-              <a:rPr sz="1300" b="0" i="0">
-                <a:solidFill>
-                  <a:srgbClr val="1E293B"/>
-                </a:solidFill>
-                <a:latin typeface="Arial"/>
-              </a:rPr>
-              <a:t>telemetry subsets.</a:t>
+              <a:t>Evaluated Processed Windows 10 telemetry subsets.</a:t>
             </a:r>
             <a:endParaRPr lang="en-US" sz="1300" b="0" i="0" dirty="0">
               <a:solidFill>
@@ -11147,23 +10517,8 @@
                 </a:solidFill>
                 <a:latin typeface="Arial"/>
               </a:rPr>
-              <a:t>Proposed model achieved peak accuracy of </a:t>
-            </a:r>
-            <a:r>
-              <a:rPr sz="1300" b="0" i="0">
-                <a:solidFill>
-                  <a:srgbClr val="1E293B"/>
-                </a:solidFill>
-                <a:latin typeface="Arial"/>
-              </a:rPr>
-              <a:t>98.75%.</a:t>
-            </a:r>
-            <a:endParaRPr sz="1300" b="0" i="0" dirty="0">
-              <a:solidFill>
-                <a:srgbClr val="1E293B"/>
-              </a:solidFill>
-              <a:latin typeface="Arial"/>
-            </a:endParaRPr>
+              <a:t>Proposed model achieved peak accuracy of 98.75%.</a:t>
+            </a:r>
           </a:p>
         </p:txBody>
       </p:sp>
@@ -11307,7 +10662,7 @@
                 </a:solidFill>
                 <a:latin typeface="Arial"/>
               </a:rPr>
-              <a:t>Federated Edge Learning for Cyberattack Detection in IoT...</a:t>
+              <a:t>Federated Edge Learning for Cyberattack Detection in IoT</a:t>
             </a:r>
             <a:endParaRPr lang="en-US" sz="1300" b="0" i="1" dirty="0">
               <a:solidFill>
@@ -11331,16 +10686,7 @@
                 </a:solidFill>
                 <a:latin typeface="Arial"/>
               </a:rPr>
-              <a:t>Proposed decentralized collaborative </a:t>
-            </a:r>
-            <a:r>
-              <a:rPr sz="1300" b="0" i="0">
-                <a:solidFill>
-                  <a:srgbClr val="1E293B"/>
-                </a:solidFill>
-                <a:latin typeface="Arial"/>
-              </a:rPr>
-              <a:t>model training.</a:t>
+              <a:t>Proposed decentralized collaborative model training.</a:t>
             </a:r>
             <a:endParaRPr lang="en-US" sz="1300" b="0" i="0" dirty="0">
               <a:solidFill>
@@ -11364,16 +10710,25 @@
                 </a:solidFill>
                 <a:latin typeface="Arial"/>
               </a:rPr>
-              <a:t>Trained local models on edge IoT nodes </a:t>
-            </a:r>
-            <a:r>
-              <a:rPr sz="1300" b="0" i="0">
-                <a:solidFill>
-                  <a:srgbClr val="1E293B"/>
-                </a:solidFill>
-                <a:latin typeface="Arial"/>
-              </a:rPr>
-              <a:t>under ToN-IoT.</a:t>
+              <a:t>Trained local models on edge IoT nodes under </a:t>
+            </a:r>
+            <a:r>
+              <a:rPr sz="1300" b="0" i="0" dirty="0" err="1">
+                <a:solidFill>
+                  <a:srgbClr val="1E293B"/>
+                </a:solidFill>
+                <a:latin typeface="Arial"/>
+              </a:rPr>
+              <a:t>ToN</a:t>
+            </a:r>
+            <a:r>
+              <a:rPr sz="1300" b="0" i="0" dirty="0">
+                <a:solidFill>
+                  <a:srgbClr val="1E293B"/>
+                </a:solidFill>
+                <a:latin typeface="Arial"/>
+              </a:rPr>
+              <a:t>-IoT.</a:t>
             </a:r>
             <a:endParaRPr lang="en-US" sz="1300" b="0" i="0" dirty="0">
               <a:solidFill>
@@ -11397,23 +10752,8 @@
                 </a:solidFill>
                 <a:latin typeface="Arial"/>
               </a:rPr>
-              <a:t>Addressed network congestion and raw </a:t>
-            </a:r>
-            <a:r>
-              <a:rPr sz="1300" b="0" i="0">
-                <a:solidFill>
-                  <a:srgbClr val="1E293B"/>
-                </a:solidFill>
-                <a:latin typeface="Arial"/>
-              </a:rPr>
-              <a:t>telemetry leakage.</a:t>
-            </a:r>
-            <a:endParaRPr sz="1300" b="0" i="0" dirty="0">
-              <a:solidFill>
-                <a:srgbClr val="1E293B"/>
-              </a:solidFill>
-              <a:latin typeface="Arial"/>
-            </a:endParaRPr>
+              <a:t>Addressed network congestion and raw telemetry leakage.</a:t>
+            </a:r>
           </a:p>
         </p:txBody>
       </p:sp>
@@ -11672,13 +11012,13 @@
   <p:clrMapOvr>
     <a:masterClrMapping/>
   </p:clrMapOvr>
-  <mc:AlternateContent xmlns:mc="http://schemas.openxmlformats.org/markup-compatibility/2006">
-    <mc:Choice xmlns:p15="http://schemas.microsoft.com/office/powerpoint/2012/main" Requires="p15">
+  <mc:AlternateContent xmlns:mc="http://schemas.openxmlformats.org/markup-compatibility/2006" xmlns:p15="http://schemas.microsoft.com/office/powerpoint/2012/main">
+    <mc:Choice Requires="p15">
       <p:transition xmlns:p14="http://schemas.microsoft.com/office/powerpoint/2010/main" spd="slow" p14:dur="1250">
         <p15:prstTrans prst="peelOff"/>
       </p:transition>
     </mc:Choice>
-    <mc:Fallback>
+    <mc:Fallback xmlns="">
       <p:transition spd="slow">
         <p:fade/>
       </p:transition>
@@ -11974,7 +11314,7 @@
                 </a:solidFill>
                 <a:latin typeface="Arial"/>
               </a:rPr>
-              <a:t>Intrusion detection on IoT systems using automatic XAI...</a:t>
+              <a:t>Intrusion detection on IoT systems using automatic XAI</a:t>
             </a:r>
           </a:p>
           <a:p>
@@ -12013,23 +11353,8 @@
                 </a:solidFill>
                 <a:latin typeface="Arial"/>
               </a:rPr>
-              <a:t>-IDS on CSE-CIC-IDS2018 (16M+ </a:t>
-            </a:r>
-            <a:r>
-              <a:rPr sz="1300" b="0" i="0">
-                <a:solidFill>
-                  <a:srgbClr val="1E293B"/>
-                </a:solidFill>
-                <a:latin typeface="Arial"/>
-              </a:rPr>
-              <a:t>flows).</a:t>
-            </a:r>
-            <a:endParaRPr sz="1300" b="0" i="0" dirty="0">
-              <a:solidFill>
-                <a:srgbClr val="1E293B"/>
-              </a:solidFill>
-              <a:latin typeface="Arial"/>
-            </a:endParaRPr>
+              <a:t>-IDS on CSE-CIC-IDS2018 (16M+ flows).</a:t>
+            </a:r>
           </a:p>
           <a:p>
             <a:pPr marL="285750" indent="-285750" algn="just">
@@ -12049,16 +11374,7 @@
                 </a:solidFill>
                 <a:latin typeface="Arial"/>
               </a:rPr>
-              <a:t>Sequential attention masks automatically select </a:t>
-            </a:r>
-            <a:r>
-              <a:rPr sz="1300" b="0" i="0">
-                <a:solidFill>
-                  <a:srgbClr val="1E293B"/>
-                </a:solidFill>
-                <a:latin typeface="Arial"/>
-              </a:rPr>
-              <a:t>key features.</a:t>
+              <a:t>Sequential attention masks automatically select key features.</a:t>
             </a:r>
             <a:endParaRPr lang="en-US" sz="1300" b="0" i="0" dirty="0">
               <a:solidFill>
@@ -12085,23 +11401,8 @@
                 </a:solidFill>
                 <a:latin typeface="Arial"/>
               </a:rPr>
-              <a:t>Outputs global &amp; local visual explanation masks at 95.58</a:t>
-            </a:r>
-            <a:r>
-              <a:rPr sz="1300" b="0" i="0">
-                <a:solidFill>
-                  <a:srgbClr val="1E293B"/>
-                </a:solidFill>
-                <a:latin typeface="Arial"/>
-              </a:rPr>
-              <a:t>% acc.</a:t>
-            </a:r>
-            <a:endParaRPr sz="1300" b="0" i="0" dirty="0">
-              <a:solidFill>
-                <a:srgbClr val="1E293B"/>
-              </a:solidFill>
-              <a:latin typeface="Arial"/>
-            </a:endParaRPr>
+              <a:t>Outputs global &amp; local visual explanation masks at 95.58% acc.</a:t>
+            </a:r>
           </a:p>
         </p:txBody>
       </p:sp>
@@ -12480,7 +11781,7 @@
                 </a:solidFill>
                 <a:latin typeface="Arial"/>
               </a:rPr>
-              <a:t>A Robust Deep Learning NIDS on Modern Protocols...</a:t>
+              <a:t>A Robust Deep Learning NIDS on Modern Protocols</a:t>
             </a:r>
           </a:p>
           <a:p>
@@ -12501,23 +11802,8 @@
                 </a:solidFill>
                 <a:latin typeface="Arial"/>
               </a:rPr>
-              <a:t>Proposed spatial Deep Convolutional Neural Network (</a:t>
-            </a:r>
-            <a:r>
-              <a:rPr sz="1300" b="0" i="0">
-                <a:solidFill>
-                  <a:srgbClr val="1E293B"/>
-                </a:solidFill>
-                <a:latin typeface="Arial"/>
-              </a:rPr>
-              <a:t>DCNN).</a:t>
-            </a:r>
-            <a:endParaRPr sz="1300" b="0" i="0" dirty="0">
-              <a:solidFill>
-                <a:srgbClr val="1E293B"/>
-              </a:solidFill>
-              <a:latin typeface="Arial"/>
-            </a:endParaRPr>
+              <a:t>Proposed spatial Deep Convolutional Neural Network (DCNN).</a:t>
+            </a:r>
           </a:p>
           <a:p>
             <a:pPr marL="285750" indent="-285750" algn="just">
@@ -12537,23 +11823,8 @@
                 </a:solidFill>
                 <a:latin typeface="Arial"/>
               </a:rPr>
-              <a:t>Evaluated on multi-day enterprise packet flows </a:t>
-            </a:r>
-            <a:r>
-              <a:rPr sz="1300" b="0" i="0">
-                <a:solidFill>
-                  <a:srgbClr val="1E293B"/>
-                </a:solidFill>
-                <a:latin typeface="Arial"/>
-              </a:rPr>
-              <a:t>of CICIDS-2017.</a:t>
-            </a:r>
-            <a:endParaRPr sz="1300" b="0" i="0" dirty="0">
-              <a:solidFill>
-                <a:srgbClr val="1E293B"/>
-              </a:solidFill>
-              <a:latin typeface="Arial"/>
-            </a:endParaRPr>
+              <a:t>Evaluated on multi-day enterprise packet flows of CICIDS-2017.</a:t>
+            </a:r>
           </a:p>
           <a:p>
             <a:pPr marL="285750" indent="-285750" algn="just">
@@ -12573,23 +11844,8 @@
                 </a:solidFill>
                 <a:latin typeface="Arial"/>
               </a:rPr>
-              <a:t>DCNN achieved a peak binary classification accuracy of </a:t>
-            </a:r>
-            <a:r>
-              <a:rPr sz="1300" b="0" i="0">
-                <a:solidFill>
-                  <a:srgbClr val="1E293B"/>
-                </a:solidFill>
-                <a:latin typeface="Arial"/>
-              </a:rPr>
-              <a:t>99.96%.</a:t>
-            </a:r>
-            <a:endParaRPr sz="1300" b="0" i="0" dirty="0">
-              <a:solidFill>
-                <a:srgbClr val="1E293B"/>
-              </a:solidFill>
-              <a:latin typeface="Arial"/>
-            </a:endParaRPr>
+              <a:t>DCNN achieved a peak binary classification accuracy of 99.96%.</a:t>
+            </a:r>
           </a:p>
         </p:txBody>
       </p:sp>
@@ -12751,7 +12007,7 @@
                 </a:solidFill>
                 <a:latin typeface="Arial"/>
               </a:rPr>
-              <a:t>Optimized Sequential Neural Network (OSNN) NIDS...</a:t>
+              <a:t>Optimized Sequential Neural Network (OSNN) NIDS</a:t>
             </a:r>
           </a:p>
           <a:p>
@@ -12772,23 +12028,8 @@
                 </a:solidFill>
                 <a:latin typeface="Arial"/>
               </a:rPr>
-              <a:t>Trained on CSE-CICIDS-2018 to resolve raw </a:t>
-            </a:r>
-            <a:r>
-              <a:rPr sz="1300" b="0" i="0">
-                <a:solidFill>
-                  <a:srgbClr val="1E293B"/>
-                </a:solidFill>
-                <a:latin typeface="Arial"/>
-              </a:rPr>
-              <a:t>high-rate threats.</a:t>
-            </a:r>
-            <a:endParaRPr sz="1300" b="0" i="0" dirty="0">
-              <a:solidFill>
-                <a:srgbClr val="1E293B"/>
-              </a:solidFill>
-              <a:latin typeface="Arial"/>
-            </a:endParaRPr>
+              <a:t>Trained on CSE-CICIDS-2018 to resolve raw high-rate threats.</a:t>
+            </a:r>
           </a:p>
           <a:p>
             <a:pPr marL="285750" indent="-285750" algn="just">
@@ -12817,23 +12058,8 @@
                 </a:solidFill>
                 <a:latin typeface="Arial"/>
               </a:rPr>
-              <a:t> binary classification + OSNN </a:t>
-            </a:r>
-            <a:r>
-              <a:rPr sz="1300" b="0" i="0">
-                <a:solidFill>
-                  <a:srgbClr val="1E293B"/>
-                </a:solidFill>
-                <a:latin typeface="Arial"/>
-              </a:rPr>
-              <a:t>multi-class model.</a:t>
-            </a:r>
-            <a:endParaRPr sz="1300" b="0" i="0" dirty="0">
-              <a:solidFill>
-                <a:srgbClr val="1E293B"/>
-              </a:solidFill>
-              <a:latin typeface="Arial"/>
-            </a:endParaRPr>
+              <a:t> binary classification + OSNN multi-class model.</a:t>
+            </a:r>
           </a:p>
           <a:p>
             <a:pPr marL="285750" indent="-285750" algn="just">
@@ -12853,23 +12079,8 @@
                 </a:solidFill>
                 <a:latin typeface="Arial"/>
               </a:rPr>
-              <a:t>Yielded optimal performance with test accuracy of </a:t>
-            </a:r>
-            <a:r>
-              <a:rPr sz="1300" b="0" i="0">
-                <a:solidFill>
-                  <a:srgbClr val="1E293B"/>
-                </a:solidFill>
-                <a:latin typeface="Arial"/>
-              </a:rPr>
-              <a:t>99.53%.</a:t>
-            </a:r>
-            <a:endParaRPr sz="1300" b="0" i="0" dirty="0">
-              <a:solidFill>
-                <a:srgbClr val="1E293B"/>
-              </a:solidFill>
-              <a:latin typeface="Arial"/>
-            </a:endParaRPr>
+              <a:t>Yielded optimal performance with test accuracy of 99.53%.</a:t>
+            </a:r>
           </a:p>
         </p:txBody>
       </p:sp>
@@ -13013,7 +12224,7 @@
                 </a:solidFill>
                 <a:latin typeface="Arial"/>
               </a:rPr>
-              <a:t>An Optimized LSTM-Based Deep Learning Model...</a:t>
+              <a:t>An Optimized LSTM-Based Deep Learning Model</a:t>
             </a:r>
           </a:p>
           <a:p>
@@ -13034,23 +12245,8 @@
                 </a:solidFill>
                 <a:latin typeface="Arial"/>
               </a:rPr>
-              <a:t>Utilized 103,825 training records from the </a:t>
-            </a:r>
-            <a:r>
-              <a:rPr sz="1300" b="0" i="0">
-                <a:solidFill>
-                  <a:srgbClr val="1E293B"/>
-                </a:solidFill>
-                <a:latin typeface="Arial"/>
-              </a:rPr>
-              <a:t>CICIDS-2017 set.</a:t>
-            </a:r>
-            <a:endParaRPr sz="1300" b="0" i="0" dirty="0">
-              <a:solidFill>
-                <a:srgbClr val="1E293B"/>
-              </a:solidFill>
-              <a:latin typeface="Arial"/>
-            </a:endParaRPr>
+              <a:t>Utilized 103,825 training records from the CICIDS-2017 set.</a:t>
+            </a:r>
           </a:p>
           <a:p>
             <a:pPr marL="285750" indent="-285750" algn="just">
@@ -13088,23 +12284,8 @@
                 </a:solidFill>
                 <a:latin typeface="Arial"/>
               </a:rPr>
-              <a:t> </a:t>
-            </a:r>
-            <a:r>
-              <a:rPr sz="1300" b="0" i="0">
-                <a:solidFill>
-                  <a:srgbClr val="1E293B"/>
-                </a:solidFill>
-                <a:latin typeface="Arial"/>
-              </a:rPr>
-              <a:t>Swarm Algorithm.</a:t>
-            </a:r>
-            <a:endParaRPr sz="1300" b="0" i="0" dirty="0">
-              <a:solidFill>
-                <a:srgbClr val="1E293B"/>
-              </a:solidFill>
-              <a:latin typeface="Arial"/>
-            </a:endParaRPr>
+              <a:t> Swarm Algorithm.</a:t>
+            </a:r>
           </a:p>
           <a:p>
             <a:pPr marL="285750" indent="-285750" algn="just">
@@ -13124,23 +12305,8 @@
                 </a:solidFill>
                 <a:latin typeface="Arial"/>
               </a:rPr>
-              <a:t>SSA-LSTMIDS registered 99.80% </a:t>
-            </a:r>
-            <a:r>
-              <a:rPr sz="1300" b="0" i="0">
-                <a:solidFill>
-                  <a:srgbClr val="1E293B"/>
-                </a:solidFill>
-                <a:latin typeface="Arial"/>
-              </a:rPr>
-              <a:t>testing accuracy.</a:t>
-            </a:r>
-            <a:endParaRPr sz="1300" b="0" i="0" dirty="0">
-              <a:solidFill>
-                <a:srgbClr val="1E293B"/>
-              </a:solidFill>
-              <a:latin typeface="Arial"/>
-            </a:endParaRPr>
+              <a:t>SSA-LSTMIDS registered 99.80% testing accuracy.</a:t>
+            </a:r>
           </a:p>
         </p:txBody>
       </p:sp>
@@ -13149,13 +12315,13 @@
   <p:clrMapOvr>
     <a:masterClrMapping/>
   </p:clrMapOvr>
-  <mc:AlternateContent xmlns:mc="http://schemas.openxmlformats.org/markup-compatibility/2006">
-    <mc:Choice xmlns:p15="http://schemas.microsoft.com/office/powerpoint/2012/main" Requires="p15">
+  <mc:AlternateContent xmlns:mc="http://schemas.openxmlformats.org/markup-compatibility/2006" xmlns:p15="http://schemas.microsoft.com/office/powerpoint/2012/main">
+    <mc:Choice Requires="p15">
       <p:transition xmlns:p14="http://schemas.microsoft.com/office/powerpoint/2010/main" spd="slow" p14:dur="1250">
         <p15:prstTrans prst="peelOff"/>
       </p:transition>
     </mc:Choice>
-    <mc:Fallback>
+    <mc:Fallback xmlns="">
       <p:transition spd="slow">
         <p:fade/>
       </p:transition>
@@ -13441,7 +12607,7 @@
                 </a:solidFill>
                 <a:latin typeface="Arial"/>
               </a:rPr>
-              <a:t>NIDS-CNNLSTM: Network Intrusion Detection classification...</a:t>
+              <a:t>NIDS-CNNLSTM: Network Intrusion Detection classification</a:t>
             </a:r>
           </a:p>
           <a:p>
@@ -13462,23 +12628,8 @@
                 </a:solidFill>
                 <a:latin typeface="Arial"/>
               </a:rPr>
-              <a:t>Used physical smart home testbed consisting of </a:t>
-            </a:r>
-            <a:r>
-              <a:rPr sz="1300" b="0" i="0">
-                <a:solidFill>
-                  <a:srgbClr val="1E293B"/>
-                </a:solidFill>
-                <a:latin typeface="Arial"/>
-              </a:rPr>
-              <a:t>105 devices.</a:t>
-            </a:r>
-            <a:endParaRPr sz="1300" b="0" i="0" dirty="0">
-              <a:solidFill>
-                <a:srgbClr val="1E293B"/>
-              </a:solidFill>
-              <a:latin typeface="Arial"/>
-            </a:endParaRPr>
+              <a:t>Used physical smart home testbed consisting of 105 devices.</a:t>
+            </a:r>
           </a:p>
           <a:p>
             <a:pPr marL="285750" indent="-285750" algn="just">
@@ -13498,23 +12649,8 @@
                 </a:solidFill>
                 <a:latin typeface="Arial"/>
               </a:rPr>
-              <a:t>Proposed 1D-CNN + LSTM sequential </a:t>
-            </a:r>
-            <a:r>
-              <a:rPr sz="1300" b="0" i="0">
-                <a:solidFill>
-                  <a:srgbClr val="1E293B"/>
-                </a:solidFill>
-                <a:latin typeface="Arial"/>
-              </a:rPr>
-              <a:t>deep architecture.</a:t>
-            </a:r>
-            <a:endParaRPr sz="1300" b="0" i="0" dirty="0">
-              <a:solidFill>
-                <a:srgbClr val="1E293B"/>
-              </a:solidFill>
-              <a:latin typeface="Arial"/>
-            </a:endParaRPr>
+              <a:t>Proposed 1D-CNN + LSTM sequential deep architecture.</a:t>
+            </a:r>
           </a:p>
           <a:p>
             <a:pPr marL="285750" indent="-285750" algn="just">
@@ -13534,23 +12670,8 @@
                 </a:solidFill>
                 <a:latin typeface="Arial"/>
               </a:rPr>
-              <a:t>Achieved 99.995% binary and 99.96% </a:t>
-            </a:r>
-            <a:r>
-              <a:rPr sz="1300" b="0" i="0">
-                <a:solidFill>
-                  <a:srgbClr val="1E293B"/>
-                </a:solidFill>
-                <a:latin typeface="Arial"/>
-              </a:rPr>
-              <a:t>multi-class accuracy.</a:t>
-            </a:r>
-            <a:endParaRPr sz="1300" b="0" i="0" dirty="0">
-              <a:solidFill>
-                <a:srgbClr val="1E293B"/>
-              </a:solidFill>
-              <a:latin typeface="Arial"/>
-            </a:endParaRPr>
+              <a:t>Achieved 99.995% binary and 99.96% multi-class accuracy.</a:t>
+            </a:r>
           </a:p>
         </p:txBody>
       </p:sp>
@@ -13694,7 +12815,7 @@
                 </a:solidFill>
                 <a:latin typeface="Arial"/>
               </a:rPr>
-              <a:t>Multi-Class Intrusion Detection Based on Transformer...</a:t>
+              <a:t>Multi-Class Intrusion Detection Based on Transformer</a:t>
             </a:r>
           </a:p>
           <a:p>
@@ -13715,23 +12836,8 @@
                 </a:solidFill>
                 <a:latin typeface="Arial"/>
               </a:rPr>
-              <a:t>Utilized raw CIC-IoT-2023 flows (46M+ records, 33 </a:t>
-            </a:r>
-            <a:r>
-              <a:rPr sz="1300" b="0" i="0">
-                <a:solidFill>
-                  <a:srgbClr val="1E293B"/>
-                </a:solidFill>
-                <a:latin typeface="Arial"/>
-              </a:rPr>
-              <a:t>attacks).</a:t>
-            </a:r>
-            <a:endParaRPr sz="1300" b="0" i="0" dirty="0">
-              <a:solidFill>
-                <a:srgbClr val="1E293B"/>
-              </a:solidFill>
-              <a:latin typeface="Arial"/>
-            </a:endParaRPr>
+              <a:t>Utilized raw CIC-IoT-2023 flows (46M+ records, 33 attacks).</a:t>
+            </a:r>
           </a:p>
           <a:p>
             <a:pPr marL="285750" indent="-285750" algn="just">
@@ -13751,23 +12857,8 @@
                 </a:solidFill>
                 <a:latin typeface="Arial"/>
               </a:rPr>
-              <a:t>Trained self-attention Transformer without </a:t>
-            </a:r>
-            <a:r>
-              <a:rPr sz="1300" b="0" i="0">
-                <a:solidFill>
-                  <a:srgbClr val="1E293B"/>
-                </a:solidFill>
-                <a:latin typeface="Arial"/>
-              </a:rPr>
-              <a:t>feature screening.</a:t>
-            </a:r>
-            <a:endParaRPr sz="1300" b="0" i="0" dirty="0">
-              <a:solidFill>
-                <a:srgbClr val="1E293B"/>
-              </a:solidFill>
-              <a:latin typeface="Arial"/>
-            </a:endParaRPr>
+              <a:t>Trained self-attention Transformer without feature screening.</a:t>
+            </a:r>
           </a:p>
           <a:p>
             <a:pPr marL="285750" indent="-285750" algn="just">
@@ -13787,23 +12878,8 @@
                 </a:solidFill>
                 <a:latin typeface="Arial"/>
               </a:rPr>
-              <a:t>Transformer encoder registered 99.40% </a:t>
-            </a:r>
-            <a:r>
-              <a:rPr sz="1300" b="0" i="0">
-                <a:solidFill>
-                  <a:srgbClr val="1E293B"/>
-                </a:solidFill>
-                <a:latin typeface="Arial"/>
-              </a:rPr>
-              <a:t>multi-class accuracy.</a:t>
-            </a:r>
-            <a:endParaRPr sz="1300" b="0" i="0" dirty="0">
-              <a:solidFill>
-                <a:srgbClr val="1E293B"/>
-              </a:solidFill>
-              <a:latin typeface="Arial"/>
-            </a:endParaRPr>
+              <a:t>Transformer encoder registered 99.40% multi-class accuracy.</a:t>
+            </a:r>
           </a:p>
         </p:txBody>
       </p:sp>
@@ -13965,7 +13041,7 @@
                 </a:solidFill>
                 <a:latin typeface="Arial"/>
               </a:rPr>
-              <a:t>An Optimized Gradient Boosting Framework for IoT ID...</a:t>
+              <a:t>An Optimized Gradient Boosting Framework for IoT ID</a:t>
             </a:r>
             <a:endParaRPr lang="en-US" sz="1300" b="0" i="1" dirty="0">
               <a:solidFill>
@@ -13989,23 +13065,26 @@
                 </a:solidFill>
                 <a:latin typeface="Arial"/>
               </a:rPr>
-              <a:t>Handled class imbalance in the 46.6M dataset </a:t>
-            </a:r>
-            <a:r>
-              <a:rPr sz="1300" b="0" i="0">
-                <a:solidFill>
-                  <a:srgbClr val="1E293B"/>
-                </a:solidFill>
-                <a:latin typeface="Arial"/>
-              </a:rPr>
-              <a:t>via undersampling.</a:t>
-            </a:r>
-            <a:endParaRPr sz="1300" b="0" i="0" dirty="0">
-              <a:solidFill>
-                <a:srgbClr val="1E293B"/>
-              </a:solidFill>
-              <a:latin typeface="Arial"/>
-            </a:endParaRPr>
+              <a:t>Handled class imbalance in the 46.6M dataset via </a:t>
+            </a:r>
+            <a:r>
+              <a:rPr sz="1300" b="0" i="0" dirty="0" err="1">
+                <a:solidFill>
+                  <a:srgbClr val="1E293B"/>
+                </a:solidFill>
+                <a:latin typeface="Arial"/>
+              </a:rPr>
+              <a:t>undersampling</a:t>
+            </a:r>
+            <a:r>
+              <a:rPr sz="1300" b="0" i="0" dirty="0">
+                <a:solidFill>
+                  <a:srgbClr val="1E293B"/>
+                </a:solidFill>
+                <a:latin typeface="Arial"/>
+              </a:rPr>
+              <a:t>.</a:t>
+            </a:r>
           </a:p>
           <a:p>
             <a:pPr marL="285750" indent="-285750" algn="just">
@@ -14025,23 +13104,8 @@
                 </a:solidFill>
                 <a:latin typeface="Arial"/>
               </a:rPr>
-              <a:t>Proposed gain-based selection for </a:t>
-            </a:r>
-            <a:r>
-              <a:rPr sz="1300" b="0" i="0">
-                <a:solidFill>
-                  <a:srgbClr val="1E293B"/>
-                </a:solidFill>
-                <a:latin typeface="Arial"/>
-              </a:rPr>
-              <a:t>dimensionality reduction.</a:t>
-            </a:r>
-            <a:endParaRPr sz="1300" b="0" i="0" dirty="0">
-              <a:solidFill>
-                <a:srgbClr val="1E293B"/>
-              </a:solidFill>
-              <a:latin typeface="Arial"/>
-            </a:endParaRPr>
+              <a:t>Proposed gain-based selection for dimensionality reduction.</a:t>
+            </a:r>
           </a:p>
           <a:p>
             <a:pPr marL="285750" indent="-285750" algn="just">
@@ -14070,23 +13134,8 @@
                 </a:solidFill>
                 <a:latin typeface="Arial"/>
               </a:rPr>
-              <a:t> model registered 8-class F1-score </a:t>
-            </a:r>
-            <a:r>
-              <a:rPr sz="1300" b="0" i="0">
-                <a:solidFill>
-                  <a:srgbClr val="1E293B"/>
-                </a:solidFill>
-                <a:latin typeface="Arial"/>
-              </a:rPr>
-              <a:t>of 0.9923.</a:t>
-            </a:r>
-            <a:endParaRPr sz="1300" b="0" i="0" dirty="0">
-              <a:solidFill>
-                <a:srgbClr val="1E293B"/>
-              </a:solidFill>
-              <a:latin typeface="Arial"/>
-            </a:endParaRPr>
+              <a:t> model registered 8-class F1-score of 0.9923.</a:t>
+            </a:r>
           </a:p>
         </p:txBody>
       </p:sp>
@@ -14248,7 +13297,7 @@
                 </a:solidFill>
                 <a:latin typeface="Arial"/>
               </a:rPr>
-              <a:t>Edge-Computing Network Intrusion Detection System in IoT...</a:t>
+              <a:t>Edge-Computing Network Intrusion Detection System in IoT</a:t>
             </a:r>
           </a:p>
           <a:p>
@@ -14287,23 +13336,8 @@
                 </a:solidFill>
                 <a:latin typeface="Arial"/>
               </a:rPr>
-              <a:t>-CNN (93.82% </a:t>
-            </a:r>
-            <a:r>
-              <a:rPr sz="1300" b="0" i="0">
-                <a:solidFill>
-                  <a:srgbClr val="1E293B"/>
-                </a:solidFill>
-                <a:latin typeface="Arial"/>
-              </a:rPr>
-              <a:t>F1).</a:t>
-            </a:r>
-            <a:endParaRPr sz="1300" b="0" i="0" dirty="0">
-              <a:solidFill>
-                <a:srgbClr val="1E293B"/>
-              </a:solidFill>
-              <a:latin typeface="Arial"/>
-            </a:endParaRPr>
+              <a:t>-CNN (93.82% F1).</a:t>
+            </a:r>
           </a:p>
           <a:p>
             <a:pPr marL="285750" indent="-285750" algn="just">
@@ -14323,23 +13357,8 @@
                 </a:solidFill>
                 <a:latin typeface="Arial"/>
               </a:rPr>
-              <a:t>1D-CNN cut training time to 144 seconds, proving </a:t>
-            </a:r>
-            <a:r>
-              <a:rPr sz="1300" b="0" i="0">
-                <a:solidFill>
-                  <a:srgbClr val="1E293B"/>
-                </a:solidFill>
-                <a:latin typeface="Arial"/>
-              </a:rPr>
-              <a:t>highly efficient.</a:t>
-            </a:r>
-            <a:endParaRPr sz="1300" b="0" i="0" dirty="0">
-              <a:solidFill>
-                <a:srgbClr val="1E293B"/>
-              </a:solidFill>
-              <a:latin typeface="Arial"/>
-            </a:endParaRPr>
+              <a:t>1D-CNN cut training time to 144 seconds, proving highly efficient.</a:t>
+            </a:r>
           </a:p>
           <a:p>
             <a:pPr marL="285750" indent="-285750" algn="just">
@@ -14359,23 +13378,8 @@
                 </a:solidFill>
                 <a:latin typeface="Arial"/>
               </a:rPr>
-              <a:t>Optimal for resource-constrained edge </a:t>
-            </a:r>
-            <a:r>
-              <a:rPr sz="1300" b="0" i="0">
-                <a:solidFill>
-                  <a:srgbClr val="1E293B"/>
-                </a:solidFill>
-                <a:latin typeface="Arial"/>
-              </a:rPr>
-              <a:t>computing environments.</a:t>
-            </a:r>
-            <a:endParaRPr sz="1300" b="0" i="0" dirty="0">
-              <a:solidFill>
-                <a:srgbClr val="1E293B"/>
-              </a:solidFill>
-              <a:latin typeface="Arial"/>
-            </a:endParaRPr>
+              <a:t>Optimal for resource-constrained edge computing environments.</a:t>
+            </a:r>
           </a:p>
         </p:txBody>
       </p:sp>
@@ -14519,7 +13523,7 @@
                 </a:solidFill>
                 <a:latin typeface="Arial"/>
               </a:rPr>
-              <a:t>CICIoT2023: A Real-Time Dataset and Benchmark...</a:t>
+              <a:t>CICIoT2023: A Real-Time Dataset and Benchmark</a:t>
             </a:r>
           </a:p>
           <a:p>
@@ -14540,23 +13544,8 @@
                 </a:solidFill>
                 <a:latin typeface="Arial"/>
               </a:rPr>
-              <a:t>Designed large-scale IoT physical smart </a:t>
-            </a:r>
-            <a:r>
-              <a:rPr sz="1300" b="0" i="0">
-                <a:solidFill>
-                  <a:srgbClr val="1E293B"/>
-                </a:solidFill>
-                <a:latin typeface="Arial"/>
-              </a:rPr>
-              <a:t>home topology.</a:t>
-            </a:r>
-            <a:endParaRPr sz="1300" b="0" i="0" dirty="0">
-              <a:solidFill>
-                <a:srgbClr val="1E293B"/>
-              </a:solidFill>
-              <a:latin typeface="Arial"/>
-            </a:endParaRPr>
+              <a:t>Designed large-scale IoT physical smart home topology.</a:t>
+            </a:r>
           </a:p>
           <a:p>
             <a:pPr marL="285750" indent="-285750" algn="just">
@@ -14576,23 +13565,8 @@
                 </a:solidFill>
                 <a:latin typeface="Arial"/>
               </a:rPr>
-              <a:t>Captured compromised IoT devices targeting other </a:t>
-            </a:r>
-            <a:r>
-              <a:rPr sz="1300" b="0" i="0">
-                <a:solidFill>
-                  <a:srgbClr val="1E293B"/>
-                </a:solidFill>
-                <a:latin typeface="Arial"/>
-              </a:rPr>
-              <a:t>IoT nodes.</a:t>
-            </a:r>
-            <a:endParaRPr sz="1300" b="0" i="0" dirty="0">
-              <a:solidFill>
-                <a:srgbClr val="1E293B"/>
-              </a:solidFill>
-              <a:latin typeface="Arial"/>
-            </a:endParaRPr>
+              <a:t>Captured compromised IoT devices targeting other IoT nodes.</a:t>
+            </a:r>
           </a:p>
           <a:p>
             <a:pPr marL="285750" indent="-285750" algn="just">
@@ -14612,23 +13586,8 @@
                 </a:solidFill>
                 <a:latin typeface="Arial"/>
               </a:rPr>
-              <a:t>Benchmark Random Forest achieved 99.68% </a:t>
-            </a:r>
-            <a:r>
-              <a:rPr sz="1300" b="0" i="0">
-                <a:solidFill>
-                  <a:srgbClr val="1E293B"/>
-                </a:solidFill>
-                <a:latin typeface="Arial"/>
-              </a:rPr>
-              <a:t>binary accuracy.</a:t>
-            </a:r>
-            <a:endParaRPr sz="1300" b="0" i="0" dirty="0">
-              <a:solidFill>
-                <a:srgbClr val="1E293B"/>
-              </a:solidFill>
-              <a:latin typeface="Arial"/>
-            </a:endParaRPr>
+              <a:t>Benchmark Random Forest achieved 99.68% binary accuracy.</a:t>
+            </a:r>
           </a:p>
         </p:txBody>
       </p:sp>
@@ -14637,13 +13596,13 @@
   <p:clrMapOvr>
     <a:masterClrMapping/>
   </p:clrMapOvr>
-  <mc:AlternateContent xmlns:mc="http://schemas.openxmlformats.org/markup-compatibility/2006">
-    <mc:Choice xmlns:p15="http://schemas.microsoft.com/office/powerpoint/2012/main" Requires="p15">
+  <mc:AlternateContent xmlns:mc="http://schemas.openxmlformats.org/markup-compatibility/2006" xmlns:p15="http://schemas.microsoft.com/office/powerpoint/2012/main">
+    <mc:Choice Requires="p15">
       <p:transition xmlns:p14="http://schemas.microsoft.com/office/powerpoint/2010/main" spd="slow" p14:dur="1250">
         <p15:prstTrans prst="peelOff"/>
       </p:transition>
     </mc:Choice>
-    <mc:Fallback>
+    <mc:Fallback xmlns="">
       <p:transition spd="slow">
         <p:fade/>
       </p:transition>
@@ -14929,7 +13888,7 @@
                 </a:solidFill>
                 <a:latin typeface="Arial"/>
               </a:rPr>
-              <a:t>A Deep Learning Approach Based on Inception-like Blocks...</a:t>
+              <a:t>A Deep Learning Approach Based on Inception-like Blocks</a:t>
             </a:r>
           </a:p>
           <a:p>
@@ -14950,23 +13909,8 @@
                 </a:solidFill>
                 <a:latin typeface="Arial"/>
               </a:rPr>
-              <a:t>Deduplicated original dataset to compile 660,621 </a:t>
-            </a:r>
-            <a:r>
-              <a:rPr sz="1300" b="0" i="0">
-                <a:solidFill>
-                  <a:srgbClr val="1E293B"/>
-                </a:solidFill>
-                <a:latin typeface="Arial"/>
-              </a:rPr>
-              <a:t>clean flows.</a:t>
-            </a:r>
-            <a:endParaRPr sz="1300" b="0" i="0" dirty="0">
-              <a:solidFill>
-                <a:srgbClr val="1E293B"/>
-              </a:solidFill>
-              <a:latin typeface="Arial"/>
-            </a:endParaRPr>
+              <a:t>Deduplicated original dataset to compile 660,621 clean flows.</a:t>
+            </a:r>
           </a:p>
           <a:p>
             <a:pPr marL="285750" indent="-285750" algn="just">
@@ -14986,23 +13930,8 @@
                 </a:solidFill>
                 <a:latin typeface="Arial"/>
               </a:rPr>
-              <a:t>Split input features into individual bytes for </a:t>
-            </a:r>
-            <a:r>
-              <a:rPr sz="1300" b="0" i="0">
-                <a:solidFill>
-                  <a:srgbClr val="1E293B"/>
-                </a:solidFill>
-                <a:latin typeface="Arial"/>
-              </a:rPr>
-              <a:t>better scaling.</a:t>
-            </a:r>
-            <a:endParaRPr sz="1300" b="0" i="0" dirty="0">
-              <a:solidFill>
-                <a:srgbClr val="1E293B"/>
-              </a:solidFill>
-              <a:latin typeface="Arial"/>
-            </a:endParaRPr>
+              <a:t>Split input features into individual bytes for better scaling.</a:t>
+            </a:r>
           </a:p>
           <a:p>
             <a:pPr marL="285750" indent="-285750" algn="just">
@@ -15022,23 +13951,8 @@
                 </a:solidFill>
                 <a:latin typeface="Arial"/>
               </a:rPr>
-              <a:t>Designed Inception block CNN yielding 99.30% </a:t>
-            </a:r>
-            <a:r>
-              <a:rPr sz="1300" b="0" i="0">
-                <a:solidFill>
-                  <a:srgbClr val="1E293B"/>
-                </a:solidFill>
-                <a:latin typeface="Arial"/>
-              </a:rPr>
-              <a:t>multi-class acc.</a:t>
-            </a:r>
-            <a:endParaRPr sz="1300" b="0" i="0" dirty="0">
-              <a:solidFill>
-                <a:srgbClr val="1E293B"/>
-              </a:solidFill>
-              <a:latin typeface="Arial"/>
-            </a:endParaRPr>
+              <a:t>Designed Inception block CNN yielding 99.30% multi-class acc.</a:t>
+            </a:r>
           </a:p>
         </p:txBody>
       </p:sp>
@@ -15182,7 +14096,7 @@
                 </a:solidFill>
                 <a:latin typeface="Arial"/>
               </a:rPr>
-              <a:t>Detecting DDoS Attacks Through Decision Tree Analysis: EDA...</a:t>
+              <a:t>Detecting DDoS Attacks Through Decision Tree Analysis: EDA</a:t>
             </a:r>
           </a:p>
           <a:p>
@@ -15390,7 +14304,7 @@
                 </a:solidFill>
                 <a:latin typeface="Arial"/>
               </a:rPr>
-              <a:t>DDoS Attack Detection Using Deep Learning and Bayesian...</a:t>
+              <a:t>DDoS Attack Detection Using Deep Learning and Bayesian</a:t>
             </a:r>
           </a:p>
           <a:p>
@@ -15432,23 +14346,8 @@
                 </a:solidFill>
                 <a:latin typeface="Arial"/>
               </a:rPr>
-              <a:t>Applied Bayesian optimization to tune sequential </a:t>
-            </a:r>
-            <a:r>
-              <a:rPr sz="1300" b="0" i="0">
-                <a:solidFill>
-                  <a:srgbClr val="1E293B"/>
-                </a:solidFill>
-                <a:latin typeface="Arial"/>
-              </a:rPr>
-              <a:t>deep network.</a:t>
-            </a:r>
-            <a:endParaRPr sz="1300" b="0" i="0" dirty="0">
-              <a:solidFill>
-                <a:srgbClr val="1E293B"/>
-              </a:solidFill>
-              <a:latin typeface="Arial"/>
-            </a:endParaRPr>
+              <a:t>Applied Bayesian optimization to tune sequential deep network.</a:t>
+            </a:r>
           </a:p>
           <a:p>
             <a:pPr marL="285750" indent="-285750" algn="just">
@@ -15468,23 +14367,8 @@
                 </a:solidFill>
                 <a:latin typeface="Arial"/>
               </a:rPr>
-              <a:t>LSTM model registered 99.40% accuracy under </a:t>
-            </a:r>
-            <a:r>
-              <a:rPr sz="1300" b="0" i="0">
-                <a:solidFill>
-                  <a:srgbClr val="1E293B"/>
-                </a:solidFill>
-                <a:latin typeface="Arial"/>
-              </a:rPr>
-              <a:t>optimal parameters.</a:t>
-            </a:r>
-            <a:endParaRPr sz="1300" b="0" i="0" dirty="0">
-              <a:solidFill>
-                <a:srgbClr val="1E293B"/>
-              </a:solidFill>
-              <a:latin typeface="Arial"/>
-            </a:endParaRPr>
+              <a:t>LSTM model registered 99.40% accuracy under optimal parameters.</a:t>
+            </a:r>
           </a:p>
         </p:txBody>
       </p:sp>
@@ -15646,7 +14530,7 @@
                 </a:solidFill>
                 <a:latin typeface="Arial"/>
               </a:rPr>
-              <a:t>Enhanced coyote optimization with deep learning based cloud...</a:t>
+              <a:t>Enhanced coyote optimization with deep learning based cloud</a:t>
             </a:r>
           </a:p>
           <a:p>
@@ -15854,7 +14738,7 @@
                 </a:solidFill>
                 <a:latin typeface="Arial"/>
               </a:rPr>
-              <a:t>Machine Learning Models Comparison on CICDDoS2019...</a:t>
+              <a:t>Machine Learning Models Comparison on CICDDoS2019</a:t>
             </a:r>
           </a:p>
           <a:p>
@@ -15875,23 +14759,8 @@
                 </a:solidFill>
                 <a:latin typeface="Arial"/>
               </a:rPr>
-              <a:t>Benchmarked SVM, KNN, DT, NB, RF, and LR on </a:t>
-            </a:r>
-            <a:r>
-              <a:rPr sz="1300" b="0" i="0">
-                <a:solidFill>
-                  <a:srgbClr val="1E293B"/>
-                </a:solidFill>
-                <a:latin typeface="Arial"/>
-              </a:rPr>
-              <a:t>multiclass DDoS.</a:t>
-            </a:r>
-            <a:endParaRPr sz="1300" b="0" i="0" dirty="0">
-              <a:solidFill>
-                <a:srgbClr val="1E293B"/>
-              </a:solidFill>
-              <a:latin typeface="Arial"/>
-            </a:endParaRPr>
+              <a:t>Benchmarked SVM, KNN, DT, NB, RF, and LR on multiclass DDoS.</a:t>
+            </a:r>
           </a:p>
           <a:p>
             <a:pPr marL="285750" indent="-285750" algn="just">
@@ -15932,23 +14801,8 @@
                 </a:solidFill>
                 <a:latin typeface="Arial"/>
               </a:rPr>
-              <a:t>Random Forest model achieved 99.00% </a:t>
-            </a:r>
-            <a:r>
-              <a:rPr sz="1300" b="0" i="0">
-                <a:solidFill>
-                  <a:srgbClr val="1E293B"/>
-                </a:solidFill>
-                <a:latin typeface="Arial"/>
-              </a:rPr>
-              <a:t>multi-class accuracy.</a:t>
-            </a:r>
-            <a:endParaRPr sz="1300" b="0" i="0" dirty="0">
-              <a:solidFill>
-                <a:srgbClr val="1E293B"/>
-              </a:solidFill>
-              <a:latin typeface="Arial"/>
-            </a:endParaRPr>
+              <a:t>Random Forest model achieved 99.00% multi-class accuracy.</a:t>
+            </a:r>
           </a:p>
         </p:txBody>
       </p:sp>
@@ -15957,13 +14811,13 @@
   <p:clrMapOvr>
     <a:masterClrMapping/>
   </p:clrMapOvr>
-  <mc:AlternateContent xmlns:mc="http://schemas.openxmlformats.org/markup-compatibility/2006">
-    <mc:Choice xmlns:p15="http://schemas.microsoft.com/office/powerpoint/2012/main" Requires="p15">
+  <mc:AlternateContent xmlns:mc="http://schemas.openxmlformats.org/markup-compatibility/2006" xmlns:p15="http://schemas.microsoft.com/office/powerpoint/2012/main">
+    <mc:Choice Requires="p15">
       <p:transition xmlns:p14="http://schemas.microsoft.com/office/powerpoint/2010/main" spd="slow" p14:dur="1250">
         <p15:prstTrans prst="peelOff"/>
       </p:transition>
     </mc:Choice>
-    <mc:Fallback>
+    <mc:Fallback xmlns="">
       <p:transition spd="slow">
         <p:fade/>
       </p:transition>
@@ -16256,7 +15110,7 @@
                 </a:solidFill>
                 <a:latin typeface="Arial"/>
               </a:rPr>
-              <a:t>Toward Enhanced Attack Detection and Explanation in IDS...</a:t>
+              <a:t>Toward Enhanced Attack Detection and Explanation in IDS</a:t>
             </a:r>
           </a:p>
           <a:p>
@@ -16277,23 +15131,8 @@
                 </a:solidFill>
                 <a:latin typeface="Arial"/>
               </a:rPr>
-              <a:t>Addressed black-box opacity in deep neural </a:t>
-            </a:r>
-            <a:r>
-              <a:rPr sz="1300" b="0" i="0">
-                <a:solidFill>
-                  <a:srgbClr val="1E293B"/>
-                </a:solidFill>
-                <a:latin typeface="Arial"/>
-              </a:rPr>
-              <a:t>network models.</a:t>
-            </a:r>
-            <a:endParaRPr sz="1300" b="0" i="0" dirty="0">
-              <a:solidFill>
-                <a:srgbClr val="1E293B"/>
-              </a:solidFill>
-              <a:latin typeface="Arial"/>
-            </a:endParaRPr>
+              <a:t>Addressed black-box opacity in deep neural network models.</a:t>
+            </a:r>
           </a:p>
           <a:p>
             <a:pPr marL="285750" indent="-285750" algn="just">
@@ -16313,23 +15152,8 @@
                 </a:solidFill>
                 <a:latin typeface="Arial"/>
               </a:rPr>
-              <a:t>Deployed ensemble blending with LIME </a:t>
-            </a:r>
-            <a:r>
-              <a:rPr sz="1300" b="0" i="0">
-                <a:solidFill>
-                  <a:srgbClr val="1E293B"/>
-                </a:solidFill>
-                <a:latin typeface="Arial"/>
-              </a:rPr>
-              <a:t>and counterfactuals.</a:t>
-            </a:r>
-            <a:endParaRPr sz="1300" b="0" i="0" dirty="0">
-              <a:solidFill>
-                <a:srgbClr val="1E293B"/>
-              </a:solidFill>
-              <a:latin typeface="Arial"/>
-            </a:endParaRPr>
+              <a:t>Deployed ensemble blending with LIME and counterfactuals.</a:t>
+            </a:r>
           </a:p>
           <a:p>
             <a:pPr marL="285750" indent="-285750" algn="just">
@@ -16349,23 +15173,8 @@
                 </a:solidFill>
                 <a:latin typeface="Arial"/>
               </a:rPr>
-              <a:t>Proposed blending model registered perfect 1.0 (100</a:t>
-            </a:r>
-            <a:r>
-              <a:rPr sz="1300" b="0" i="0">
-                <a:solidFill>
-                  <a:srgbClr val="1E293B"/>
-                </a:solidFill>
-                <a:latin typeface="Arial"/>
-              </a:rPr>
-              <a:t>%) accuracy.</a:t>
-            </a:r>
-            <a:endParaRPr sz="1300" b="0" i="0" dirty="0">
-              <a:solidFill>
-                <a:srgbClr val="1E293B"/>
-              </a:solidFill>
-              <a:latin typeface="Arial"/>
-            </a:endParaRPr>
+              <a:t>Proposed blending model registered perfect 1.0 (100%) accuracy.</a:t>
+            </a:r>
           </a:p>
         </p:txBody>
       </p:sp>
@@ -16509,7 +15318,7 @@
                 </a:solidFill>
                 <a:latin typeface="Arial"/>
               </a:rPr>
-              <a:t>IoT Intrusion Detection Using ML with a Novel Feature Selection...</a:t>
+              <a:t>IoT Intrusion Detection Using ML with a Novel Feature Selection</a:t>
             </a:r>
           </a:p>
           <a:p>
@@ -16548,23 +15357,8 @@
                 </a:solidFill>
                 <a:latin typeface="Arial"/>
               </a:rPr>
-              <a:t> (Correlation + Chi-Square) </a:t>
-            </a:r>
-            <a:r>
-              <a:rPr sz="1300" b="0" i="0">
-                <a:solidFill>
-                  <a:srgbClr val="1E293B"/>
-                </a:solidFill>
-                <a:latin typeface="Arial"/>
-              </a:rPr>
-              <a:t>feature selection.</a:t>
-            </a:r>
-            <a:endParaRPr sz="1300" b="0" i="0" dirty="0">
-              <a:solidFill>
-                <a:srgbClr val="1E293B"/>
-              </a:solidFill>
-              <a:latin typeface="Arial"/>
-            </a:endParaRPr>
+              <a:t> (Correlation + Chi-Square) feature selection.</a:t>
+            </a:r>
           </a:p>
           <a:p>
             <a:pPr marL="285750" indent="-285750" algn="just">
@@ -16584,23 +15378,8 @@
                 </a:solidFill>
                 <a:latin typeface="Arial"/>
               </a:rPr>
-              <a:t>Pruned feature space down to 15 core parameters, </a:t>
-            </a:r>
-            <a:r>
-              <a:rPr sz="1300" b="0" i="0">
-                <a:solidFill>
-                  <a:srgbClr val="1E293B"/>
-                </a:solidFill>
-                <a:latin typeface="Arial"/>
-              </a:rPr>
-              <a:t>reducing complexity.</a:t>
-            </a:r>
-            <a:endParaRPr sz="1300" b="0" i="0" dirty="0">
-              <a:solidFill>
-                <a:srgbClr val="1E293B"/>
-              </a:solidFill>
-              <a:latin typeface="Arial"/>
-            </a:endParaRPr>
+              <a:t>Pruned feature space down to 15 core parameters, reducing complexity.</a:t>
+            </a:r>
           </a:p>
           <a:p>
             <a:pPr marL="285750" indent="-285750" algn="just">
@@ -16620,23 +15399,8 @@
                 </a:solidFill>
                 <a:latin typeface="Arial"/>
               </a:rPr>
-              <a:t>Decision Tree achieved 99.80% accuracy in just 46ms </a:t>
-            </a:r>
-            <a:r>
-              <a:rPr sz="1300" b="0" i="0">
-                <a:solidFill>
-                  <a:srgbClr val="1E293B"/>
-                </a:solidFill>
-                <a:latin typeface="Arial"/>
-              </a:rPr>
-              <a:t>CPU runtime.</a:t>
-            </a:r>
-            <a:endParaRPr sz="1300" b="0" i="0" dirty="0">
-              <a:solidFill>
-                <a:srgbClr val="1E293B"/>
-              </a:solidFill>
-              <a:latin typeface="Arial"/>
-            </a:endParaRPr>
+              <a:t>Decision Tree achieved 99.80% accuracy in just 46ms CPU runtime.</a:t>
+            </a:r>
           </a:p>
         </p:txBody>
       </p:sp>
@@ -16789,7 +15553,7 @@
                 </a:solidFill>
                 <a:latin typeface="Arial"/>
               </a:rPr>
-              <a:t>HIDS-IoMT: A Deep Learning-Based Intelligent IDS...</a:t>
+              <a:t>HIDS-IoMT: A Deep Learning-Based Intelligent IDS</a:t>
             </a:r>
           </a:p>
           <a:p>
@@ -16828,23 +15592,8 @@
                 </a:solidFill>
                 <a:latin typeface="Arial"/>
               </a:rPr>
-              <a:t> on smart-home testbed victims (Wi-Fi camera, </a:t>
-            </a:r>
-            <a:r>
-              <a:rPr sz="1300" b="0" i="0">
-                <a:solidFill>
-                  <a:srgbClr val="1E293B"/>
-                </a:solidFill>
-                <a:latin typeface="Arial"/>
-              </a:rPr>
-              <a:t>smartphones).</a:t>
-            </a:r>
-            <a:endParaRPr sz="1300" b="0" i="0" dirty="0">
-              <a:solidFill>
-                <a:srgbClr val="1E293B"/>
-              </a:solidFill>
-              <a:latin typeface="Arial"/>
-            </a:endParaRPr>
+              <a:t> on smart-home testbed victims (Wi-Fi camera, smartphones).</a:t>
+            </a:r>
           </a:p>
           <a:p>
             <a:pPr marL="285750" indent="-285750" algn="just">
@@ -16864,23 +15613,8 @@
                 </a:solidFill>
                 <a:latin typeface="Arial"/>
               </a:rPr>
-              <a:t>Mapped legal patterns against Mirai, DoS, Scan, and </a:t>
-            </a:r>
-            <a:r>
-              <a:rPr sz="1300" b="0" i="0">
-                <a:solidFill>
-                  <a:srgbClr val="1E293B"/>
-                </a:solidFill>
-                <a:latin typeface="Arial"/>
-              </a:rPr>
-              <a:t>MitM threats.</a:t>
-            </a:r>
-            <a:endParaRPr sz="1300" b="0" i="0" dirty="0">
-              <a:solidFill>
-                <a:srgbClr val="1E293B"/>
-              </a:solidFill>
-              <a:latin typeface="Arial"/>
-            </a:endParaRPr>
+              <a:t>Mapped legal patterns against Mirai, DoS, Scan, and MitM threats.</a:t>
+            </a:r>
           </a:p>
           <a:p>
             <a:pPr marL="285750" indent="-285750" algn="just">
@@ -16900,23 +15634,8 @@
                 </a:solidFill>
                 <a:latin typeface="Arial"/>
               </a:rPr>
-              <a:t>DCNN architecture achieved 99.860% </a:t>
-            </a:r>
-            <a:r>
-              <a:rPr sz="1300" b="0" i="0">
-                <a:solidFill>
-                  <a:srgbClr val="1E293B"/>
-                </a:solidFill>
-                <a:latin typeface="Arial"/>
-              </a:rPr>
-              <a:t>multiclass accuracy.</a:t>
-            </a:r>
-            <a:endParaRPr sz="1300" b="0" i="0" dirty="0">
-              <a:solidFill>
-                <a:srgbClr val="1E293B"/>
-              </a:solidFill>
-              <a:latin typeface="Arial"/>
-            </a:endParaRPr>
+              <a:t>DCNN architecture achieved 99.860% multiclass accuracy.</a:t>
+            </a:r>
           </a:p>
         </p:txBody>
       </p:sp>
@@ -17060,7 +15779,7 @@
                 </a:solidFill>
                 <a:latin typeface="Arial"/>
               </a:rPr>
-              <a:t>A hybrid feature selection technique... on NF-BoT-IoT-v2 and IoTID20</a:t>
+              <a:t>A hybrid feature selection technique on NF-BoT-IoT-v2 and IoTID20</a:t>
             </a:r>
           </a:p>
           <a:p>
@@ -17081,23 +15800,8 @@
                 </a:solidFill>
                 <a:latin typeface="Arial"/>
               </a:rPr>
-              <a:t>Analyzed 625,783 flow samples of the </a:t>
-            </a:r>
-            <a:r>
-              <a:rPr sz="1300" b="0" i="0">
-                <a:solidFill>
-                  <a:srgbClr val="1E293B"/>
-                </a:solidFill>
-                <a:latin typeface="Arial"/>
-              </a:rPr>
-              <a:t>IoTID20 dataset.</a:t>
-            </a:r>
-            <a:endParaRPr sz="1300" b="0" i="0" dirty="0">
-              <a:solidFill>
-                <a:srgbClr val="1E293B"/>
-              </a:solidFill>
-              <a:latin typeface="Arial"/>
-            </a:endParaRPr>
+              <a:t>Analyzed 625,783 flow samples of the IoTID20 dataset.</a:t>
+            </a:r>
           </a:p>
           <a:p>
             <a:pPr marL="285750" indent="-285750" algn="just">
@@ -17117,23 +15821,8 @@
                 </a:solidFill>
                 <a:latin typeface="Arial"/>
               </a:rPr>
-              <a:t>Mutual Information + Spearman Rank + Firefly </a:t>
-            </a:r>
-            <a:r>
-              <a:rPr sz="1300" b="0" i="0">
-                <a:solidFill>
-                  <a:srgbClr val="1E293B"/>
-                </a:solidFill>
-                <a:latin typeface="Arial"/>
-              </a:rPr>
-              <a:t>Feature Selection.</a:t>
-            </a:r>
-            <a:endParaRPr sz="1300" b="0" i="0" dirty="0">
-              <a:solidFill>
-                <a:srgbClr val="1E293B"/>
-              </a:solidFill>
-              <a:latin typeface="Arial"/>
-            </a:endParaRPr>
+              <a:t>Mutual Information + Spearman Rank + Firefly Feature Selection.</a:t>
+            </a:r>
           </a:p>
           <a:p>
             <a:pPr marL="285750" indent="-285750" algn="just">
@@ -17153,23 +15842,8 @@
                 </a:solidFill>
                 <a:latin typeface="Arial"/>
               </a:rPr>
-              <a:t>Deep LSTM NIDS registered 89.54% accuracy </a:t>
-            </a:r>
-            <a:r>
-              <a:rPr sz="1300" b="0" i="0">
-                <a:solidFill>
-                  <a:srgbClr val="1E293B"/>
-                </a:solidFill>
-                <a:latin typeface="Arial"/>
-              </a:rPr>
-              <a:t>on multi-class.</a:t>
-            </a:r>
-            <a:endParaRPr sz="1300" b="0" i="0" dirty="0">
-              <a:solidFill>
-                <a:srgbClr val="1E293B"/>
-              </a:solidFill>
-              <a:latin typeface="Arial"/>
-            </a:endParaRPr>
+              <a:t>Deep LSTM NIDS registered 89.54% accuracy on multi-class.</a:t>
+            </a:r>
           </a:p>
         </p:txBody>
       </p:sp>
@@ -17331,7 +16005,7 @@
                 </a:solidFill>
                 <a:latin typeface="Arial"/>
               </a:rPr>
-              <a:t>Deep learning approaches for intrusion-detection systems in IoT...</a:t>
+              <a:t>Deep learning approaches for intrusion-detection systems in IoT</a:t>
             </a:r>
           </a:p>
           <a:p>
@@ -17352,23 +16026,8 @@
                 </a:solidFill>
                 <a:latin typeface="Arial"/>
               </a:rPr>
-              <a:t>Split smart-home devices into attacking and </a:t>
-            </a:r>
-            <a:r>
-              <a:rPr sz="1300" b="0" i="0">
-                <a:solidFill>
-                  <a:srgbClr val="1E293B"/>
-                </a:solidFill>
-                <a:latin typeface="Arial"/>
-              </a:rPr>
-              <a:t>victim nodes.</a:t>
-            </a:r>
-            <a:endParaRPr sz="1300" b="0" i="0" dirty="0">
-              <a:solidFill>
-                <a:srgbClr val="1E293B"/>
-              </a:solidFill>
-              <a:latin typeface="Arial"/>
-            </a:endParaRPr>
+              <a:t>Split smart-home devices into attacking and victim nodes.</a:t>
+            </a:r>
           </a:p>
           <a:p>
             <a:pPr marL="285750" indent="-285750" algn="just">
@@ -17388,23 +16047,8 @@
                 </a:solidFill>
                 <a:latin typeface="Arial"/>
               </a:rPr>
-              <a:t>Evaluated LR, SVM, DT, and ANN classifiers on </a:t>
-            </a:r>
-            <a:r>
-              <a:rPr sz="1300" b="0" i="0">
-                <a:solidFill>
-                  <a:srgbClr val="1E293B"/>
-                </a:solidFill>
-                <a:latin typeface="Arial"/>
-              </a:rPr>
-              <a:t>binarized flows.</a:t>
-            </a:r>
-            <a:endParaRPr sz="1300" b="0" i="0" dirty="0">
-              <a:solidFill>
-                <a:srgbClr val="1E293B"/>
-              </a:solidFill>
-              <a:latin typeface="Arial"/>
-            </a:endParaRPr>
+              <a:t>Evaluated LR, SVM, DT, and ANN classifiers on binarized flows.</a:t>
+            </a:r>
           </a:p>
           <a:p>
             <a:pPr marL="285750" indent="-285750" algn="just">
@@ -17424,23 +16068,8 @@
                 </a:solidFill>
                 <a:latin typeface="Arial"/>
               </a:rPr>
-              <a:t>Determined local cluster neighborhood boundaries on Mirai </a:t>
-            </a:r>
-            <a:r>
-              <a:rPr sz="1300" b="0" i="0">
-                <a:solidFill>
-                  <a:srgbClr val="1E293B"/>
-                </a:solidFill>
-                <a:latin typeface="Arial"/>
-              </a:rPr>
-              <a:t>and Scan.</a:t>
-            </a:r>
-            <a:endParaRPr sz="1300" b="0" i="0" dirty="0">
-              <a:solidFill>
-                <a:srgbClr val="1E293B"/>
-              </a:solidFill>
-              <a:latin typeface="Arial"/>
-            </a:endParaRPr>
+              <a:t>Determined local cluster neighborhood boundaries on Mirai and Scan.</a:t>
+            </a:r>
           </a:p>
         </p:txBody>
       </p:sp>
@@ -17449,13 +16078,13 @@
   <p:clrMapOvr>
     <a:masterClrMapping/>
   </p:clrMapOvr>
-  <mc:AlternateContent xmlns:mc="http://schemas.openxmlformats.org/markup-compatibility/2006">
-    <mc:Choice xmlns:p15="http://schemas.microsoft.com/office/powerpoint/2012/main" Requires="p15">
+  <mc:AlternateContent xmlns:mc="http://schemas.openxmlformats.org/markup-compatibility/2006" xmlns:p15="http://schemas.microsoft.com/office/powerpoint/2012/main">
+    <mc:Choice Requires="p15">
       <p:transition xmlns:p14="http://schemas.microsoft.com/office/powerpoint/2010/main" spd="slow" p14:dur="1250">
         <p15:prstTrans prst="peelOff"/>
       </p:transition>
     </mc:Choice>
-    <mc:Fallback>
+    <mc:Fallback xmlns="">
       <p:transition spd="slow">
         <p:fade/>
       </p:transition>
